--- a/Chapitre_02_SystemesSequentiels/Fiche/images/Figures.pptx
+++ b/Chapitre_02_SystemesSequentiels/Fiche/images/Figures.pptx
@@ -7,15 +7,16 @@
   <p:sldIdLst>
     <p:sldId id="264" r:id="rId2"/>
     <p:sldId id="265" r:id="rId3"/>
-    <p:sldId id="266" r:id="rId4"/>
-    <p:sldId id="256" r:id="rId5"/>
-    <p:sldId id="260" r:id="rId6"/>
-    <p:sldId id="257" r:id="rId7"/>
-    <p:sldId id="262" r:id="rId8"/>
-    <p:sldId id="263" r:id="rId9"/>
-    <p:sldId id="258" r:id="rId10"/>
-    <p:sldId id="259" r:id="rId11"/>
-    <p:sldId id="261" r:id="rId12"/>
+    <p:sldId id="267" r:id="rId4"/>
+    <p:sldId id="266" r:id="rId5"/>
+    <p:sldId id="256" r:id="rId6"/>
+    <p:sldId id="260" r:id="rId7"/>
+    <p:sldId id="257" r:id="rId8"/>
+    <p:sldId id="262" r:id="rId9"/>
+    <p:sldId id="263" r:id="rId10"/>
+    <p:sldId id="258" r:id="rId11"/>
+    <p:sldId id="259" r:id="rId12"/>
+    <p:sldId id="261" r:id="rId13"/>
   </p:sldIdLst>
   <p:sldSz cx="9144000" cy="6858000" type="screen4x3"/>
   <p:notesSz cx="6858000" cy="9144000"/>
@@ -314,7 +315,7 @@
           <a:p>
             <a:fld id="{AA309A6D-C09C-4548-B29A-6CF363A7E532}" type="datetimeFigureOut">
               <a:rPr lang="fr-FR" smtClean="0"/>
-              <a:t>03/03/2026</a:t>
+              <a:t>04/03/2026</a:t>
             </a:fld>
             <a:endParaRPr lang="fr-BE"/>
           </a:p>
@@ -479,7 +480,7 @@
           <a:p>
             <a:fld id="{AA309A6D-C09C-4548-B29A-6CF363A7E532}" type="datetimeFigureOut">
               <a:rPr lang="fr-FR" smtClean="0"/>
-              <a:t>03/03/2026</a:t>
+              <a:t>04/03/2026</a:t>
             </a:fld>
             <a:endParaRPr lang="fr-BE"/>
           </a:p>
@@ -654,7 +655,7 @@
           <a:p>
             <a:fld id="{AA309A6D-C09C-4548-B29A-6CF363A7E532}" type="datetimeFigureOut">
               <a:rPr lang="fr-FR" smtClean="0"/>
-              <a:t>03/03/2026</a:t>
+              <a:t>04/03/2026</a:t>
             </a:fld>
             <a:endParaRPr lang="fr-BE"/>
           </a:p>
@@ -819,7 +820,7 @@
           <a:p>
             <a:fld id="{AA309A6D-C09C-4548-B29A-6CF363A7E532}" type="datetimeFigureOut">
               <a:rPr lang="fr-FR" smtClean="0"/>
-              <a:t>03/03/2026</a:t>
+              <a:t>04/03/2026</a:t>
             </a:fld>
             <a:endParaRPr lang="fr-BE"/>
           </a:p>
@@ -1060,7 +1061,7 @@
           <a:p>
             <a:fld id="{AA309A6D-C09C-4548-B29A-6CF363A7E532}" type="datetimeFigureOut">
               <a:rPr lang="fr-FR" smtClean="0"/>
-              <a:t>03/03/2026</a:t>
+              <a:t>04/03/2026</a:t>
             </a:fld>
             <a:endParaRPr lang="fr-BE"/>
           </a:p>
@@ -1343,7 +1344,7 @@
           <a:p>
             <a:fld id="{AA309A6D-C09C-4548-B29A-6CF363A7E532}" type="datetimeFigureOut">
               <a:rPr lang="fr-FR" smtClean="0"/>
-              <a:t>03/03/2026</a:t>
+              <a:t>04/03/2026</a:t>
             </a:fld>
             <a:endParaRPr lang="fr-BE"/>
           </a:p>
@@ -1760,7 +1761,7 @@
           <a:p>
             <a:fld id="{AA309A6D-C09C-4548-B29A-6CF363A7E532}" type="datetimeFigureOut">
               <a:rPr lang="fr-FR" smtClean="0"/>
-              <a:t>03/03/2026</a:t>
+              <a:t>04/03/2026</a:t>
             </a:fld>
             <a:endParaRPr lang="fr-BE"/>
           </a:p>
@@ -1873,7 +1874,7 @@
           <a:p>
             <a:fld id="{AA309A6D-C09C-4548-B29A-6CF363A7E532}" type="datetimeFigureOut">
               <a:rPr lang="fr-FR" smtClean="0"/>
-              <a:t>03/03/2026</a:t>
+              <a:t>04/03/2026</a:t>
             </a:fld>
             <a:endParaRPr lang="fr-BE"/>
           </a:p>
@@ -1963,7 +1964,7 @@
           <a:p>
             <a:fld id="{AA309A6D-C09C-4548-B29A-6CF363A7E532}" type="datetimeFigureOut">
               <a:rPr lang="fr-FR" smtClean="0"/>
-              <a:t>03/03/2026</a:t>
+              <a:t>04/03/2026</a:t>
             </a:fld>
             <a:endParaRPr lang="fr-BE"/>
           </a:p>
@@ -2235,7 +2236,7 @@
           <a:p>
             <a:fld id="{AA309A6D-C09C-4548-B29A-6CF363A7E532}" type="datetimeFigureOut">
               <a:rPr lang="fr-FR" smtClean="0"/>
-              <a:t>03/03/2026</a:t>
+              <a:t>04/03/2026</a:t>
             </a:fld>
             <a:endParaRPr lang="fr-BE"/>
           </a:p>
@@ -2483,7 +2484,7 @@
           <a:p>
             <a:fld id="{AA309A6D-C09C-4548-B29A-6CF363A7E532}" type="datetimeFigureOut">
               <a:rPr lang="fr-FR" smtClean="0"/>
-              <a:t>03/03/2026</a:t>
+              <a:t>04/03/2026</a:t>
             </a:fld>
             <a:endParaRPr lang="fr-BE"/>
           </a:p>
@@ -2691,7 +2692,7 @@
           <a:p>
             <a:fld id="{AA309A6D-C09C-4548-B29A-6CF363A7E532}" type="datetimeFigureOut">
               <a:rPr lang="fr-FR" smtClean="0"/>
-              <a:t>03/03/2026</a:t>
+              <a:t>04/03/2026</a:t>
             </a:fld>
             <a:endParaRPr lang="fr-BE"/>
           </a:p>
@@ -3597,8 +3598,8 @@
           </a:p>
         </p:txBody>
       </p:sp>
-      <mc:AlternateContent xmlns:mc="http://schemas.openxmlformats.org/markup-compatibility/2006">
-        <mc:Choice xmlns:a14="http://schemas.microsoft.com/office/drawing/2010/main" Requires="a14">
+      <mc:AlternateContent xmlns:mc="http://schemas.openxmlformats.org/markup-compatibility/2006" xmlns:a14="http://schemas.microsoft.com/office/drawing/2010/main">
+        <mc:Choice Requires="a14">
           <p:sp>
             <p:nvSpPr>
               <p:cNvPr id="35" name="ZoneTexte 34">
@@ -3796,7 +3797,7 @@
             </p:txBody>
           </p:sp>
         </mc:Choice>
-        <mc:Fallback>
+        <mc:Fallback xmlns="">
           <p:sp>
             <p:nvSpPr>
               <p:cNvPr id="35" name="ZoneTexte 34">
@@ -3841,8 +3842,8 @@
           </p:sp>
         </mc:Fallback>
       </mc:AlternateContent>
-      <mc:AlternateContent xmlns:mc="http://schemas.openxmlformats.org/markup-compatibility/2006">
-        <mc:Choice xmlns:a14="http://schemas.microsoft.com/office/drawing/2010/main" Requires="a14">
+      <mc:AlternateContent xmlns:mc="http://schemas.openxmlformats.org/markup-compatibility/2006" xmlns:a14="http://schemas.microsoft.com/office/drawing/2010/main">
+        <mc:Choice Requires="a14">
           <p:sp>
             <p:nvSpPr>
               <p:cNvPr id="36" name="ZoneTexte 35">
@@ -4040,7 +4041,7 @@
             </p:txBody>
           </p:sp>
         </mc:Choice>
-        <mc:Fallback>
+        <mc:Fallback xmlns="">
           <p:sp>
             <p:nvSpPr>
               <p:cNvPr id="36" name="ZoneTexte 35">
@@ -4085,8 +4086,8 @@
           </p:sp>
         </mc:Fallback>
       </mc:AlternateContent>
-      <mc:AlternateContent xmlns:mc="http://schemas.openxmlformats.org/markup-compatibility/2006">
-        <mc:Choice xmlns:a14="http://schemas.microsoft.com/office/drawing/2010/main" Requires="a14">
+      <mc:AlternateContent xmlns:mc="http://schemas.openxmlformats.org/markup-compatibility/2006" xmlns:a14="http://schemas.microsoft.com/office/drawing/2010/main">
+        <mc:Choice Requires="a14">
           <p:sp>
             <p:nvSpPr>
               <p:cNvPr id="39" name="ZoneTexte 38">
@@ -4165,7 +4166,7 @@
             </p:txBody>
           </p:sp>
         </mc:Choice>
-        <mc:Fallback>
+        <mc:Fallback xmlns="">
           <p:sp>
             <p:nvSpPr>
               <p:cNvPr id="39" name="ZoneTexte 38">
@@ -4210,8 +4211,8 @@
           </p:sp>
         </mc:Fallback>
       </mc:AlternateContent>
-      <mc:AlternateContent xmlns:mc="http://schemas.openxmlformats.org/markup-compatibility/2006">
-        <mc:Choice xmlns:a14="http://schemas.microsoft.com/office/drawing/2010/main" Requires="a14">
+      <mc:AlternateContent xmlns:mc="http://schemas.openxmlformats.org/markup-compatibility/2006" xmlns:a14="http://schemas.microsoft.com/office/drawing/2010/main">
+        <mc:Choice Requires="a14">
           <p:sp>
             <p:nvSpPr>
               <p:cNvPr id="40" name="ZoneTexte 39">
@@ -4240,7 +4241,6 @@
               </a:bodyPr>
               <a:lstStyle/>
               <a:p>
-                <a:pPr/>
                 <a14:m>
                   <m:oMath xmlns:m="http://schemas.openxmlformats.org/officeDocument/2006/math">
                     <m:d>
@@ -4291,7 +4291,7 @@
             </p:txBody>
           </p:sp>
         </mc:Choice>
-        <mc:Fallback>
+        <mc:Fallback xmlns="">
           <p:sp>
             <p:nvSpPr>
               <p:cNvPr id="40" name="ZoneTexte 39">
@@ -4444,8 +4444,8 @@
           </a:p>
         </p:txBody>
       </p:sp>
-      <mc:AlternateContent xmlns:mc="http://schemas.openxmlformats.org/markup-compatibility/2006">
-        <mc:Choice xmlns:a14="http://schemas.microsoft.com/office/drawing/2010/main" Requires="a14">
+      <mc:AlternateContent xmlns:mc="http://schemas.openxmlformats.org/markup-compatibility/2006" xmlns:a14="http://schemas.microsoft.com/office/drawing/2010/main">
+        <mc:Choice Requires="a14">
           <p:sp>
             <p:nvSpPr>
               <p:cNvPr id="45" name="ZoneTexte 44">
@@ -4474,7 +4474,6 @@
               </a:bodyPr>
               <a:lstStyle/>
               <a:p>
-                <a:pPr/>
                 <a14:m>
                   <m:oMath xmlns:m="http://schemas.openxmlformats.org/officeDocument/2006/math">
                     <m:d>
@@ -4525,7 +4524,7 @@
             </p:txBody>
           </p:sp>
         </mc:Choice>
-        <mc:Fallback>
+        <mc:Fallback xmlns="">
           <p:sp>
             <p:nvSpPr>
               <p:cNvPr id="45" name="ZoneTexte 44">
@@ -4570,8 +4569,8 @@
           </p:sp>
         </mc:Fallback>
       </mc:AlternateContent>
-      <mc:AlternateContent xmlns:mc="http://schemas.openxmlformats.org/markup-compatibility/2006">
-        <mc:Choice xmlns:a14="http://schemas.microsoft.com/office/drawing/2010/main" Requires="a14">
+      <mc:AlternateContent xmlns:mc="http://schemas.openxmlformats.org/markup-compatibility/2006" xmlns:a14="http://schemas.microsoft.com/office/drawing/2010/main">
+        <mc:Choice Requires="a14">
           <p:sp>
             <p:nvSpPr>
               <p:cNvPr id="46" name="ZoneTexte 45">
@@ -4650,7 +4649,7 @@
             </p:txBody>
           </p:sp>
         </mc:Choice>
-        <mc:Fallback>
+        <mc:Fallback xmlns="">
           <p:sp>
             <p:nvSpPr>
               <p:cNvPr id="46" name="ZoneTexte 45">
@@ -4695,8 +4694,8 @@
           </p:sp>
         </mc:Fallback>
       </mc:AlternateContent>
-      <mc:AlternateContent xmlns:mc="http://schemas.openxmlformats.org/markup-compatibility/2006">
-        <mc:Choice xmlns:a14="http://schemas.microsoft.com/office/drawing/2010/main" Requires="a14">
+      <mc:AlternateContent xmlns:mc="http://schemas.openxmlformats.org/markup-compatibility/2006" xmlns:a14="http://schemas.microsoft.com/office/drawing/2010/main">
+        <mc:Choice Requires="a14">
           <p:sp>
             <p:nvSpPr>
               <p:cNvPr id="47" name="ZoneTexte 46">
@@ -4775,7 +4774,7 @@
             </p:txBody>
           </p:sp>
         </mc:Choice>
-        <mc:Fallback>
+        <mc:Fallback xmlns="">
           <p:sp>
             <p:nvSpPr>
               <p:cNvPr id="47" name="ZoneTexte 46">
@@ -4820,8 +4819,8 @@
           </p:sp>
         </mc:Fallback>
       </mc:AlternateContent>
-      <mc:AlternateContent xmlns:mc="http://schemas.openxmlformats.org/markup-compatibility/2006">
-        <mc:Choice xmlns:a14="http://schemas.microsoft.com/office/drawing/2010/main" Requires="a14">
+      <mc:AlternateContent xmlns:mc="http://schemas.openxmlformats.org/markup-compatibility/2006" xmlns:a14="http://schemas.microsoft.com/office/drawing/2010/main">
+        <mc:Choice Requires="a14">
           <p:sp>
             <p:nvSpPr>
               <p:cNvPr id="48" name="ZoneTexte 47">
@@ -4850,7 +4849,6 @@
               </a:bodyPr>
               <a:lstStyle/>
               <a:p>
-                <a:pPr/>
                 <a14:m>
                   <m:oMath xmlns:m="http://schemas.openxmlformats.org/officeDocument/2006/math">
                     <m:d>
@@ -4901,7 +4899,7 @@
             </p:txBody>
           </p:sp>
         </mc:Choice>
-        <mc:Fallback>
+        <mc:Fallback xmlns="">
           <p:sp>
             <p:nvSpPr>
               <p:cNvPr id="48" name="ZoneTexte 47">
@@ -4960,6 +4958,1987 @@
 </file>
 
 <file path=ppt/slides/slide10.xml><?xml version="1.0" encoding="utf-8"?>
+<p:sld xmlns:a="http://schemas.openxmlformats.org/drawingml/2006/main" xmlns:r="http://schemas.openxmlformats.org/officeDocument/2006/relationships" xmlns:p="http://schemas.openxmlformats.org/presentationml/2006/main">
+  <p:cSld>
+    <p:spTree>
+      <p:nvGrpSpPr>
+        <p:cNvPr id="1" name=""/>
+        <p:cNvGrpSpPr/>
+        <p:nvPr/>
+      </p:nvGrpSpPr>
+      <p:grpSpPr>
+        <a:xfrm>
+          <a:off x="0" y="0"/>
+          <a:ext cx="0" cy="0"/>
+          <a:chOff x="0" y="0"/>
+          <a:chExt cx="0" cy="0"/>
+        </a:xfrm>
+      </p:grpSpPr>
+      <p:cxnSp>
+        <p:nvCxnSpPr>
+          <p:cNvPr id="4" name="Connecteur droit 3"/>
+          <p:cNvCxnSpPr/>
+          <p:nvPr/>
+        </p:nvCxnSpPr>
+        <p:spPr>
+          <a:xfrm>
+            <a:off x="971600" y="1989437"/>
+            <a:ext cx="576064" cy="0"/>
+          </a:xfrm>
+          <a:prstGeom prst="line">
+            <a:avLst/>
+          </a:prstGeom>
+          <a:ln w="28575">
+            <a:solidFill>
+              <a:srgbClr val="0070C0"/>
+            </a:solidFill>
+          </a:ln>
+        </p:spPr>
+        <p:style>
+          <a:lnRef idx="1">
+            <a:schemeClr val="accent1"/>
+          </a:lnRef>
+          <a:fillRef idx="0">
+            <a:schemeClr val="accent1"/>
+          </a:fillRef>
+          <a:effectRef idx="0">
+            <a:schemeClr val="accent1"/>
+          </a:effectRef>
+          <a:fontRef idx="minor">
+            <a:schemeClr val="tx1"/>
+          </a:fontRef>
+        </p:style>
+      </p:cxnSp>
+      <p:cxnSp>
+        <p:nvCxnSpPr>
+          <p:cNvPr id="7" name="Connecteur droit 6"/>
+          <p:cNvCxnSpPr/>
+          <p:nvPr/>
+        </p:nvCxnSpPr>
+        <p:spPr>
+          <a:xfrm flipV="1">
+            <a:off x="971600" y="1058715"/>
+            <a:ext cx="0" cy="1072549"/>
+          </a:xfrm>
+          <a:prstGeom prst="line">
+            <a:avLst/>
+          </a:prstGeom>
+          <a:ln w="28575">
+            <a:solidFill>
+              <a:srgbClr val="0070C0"/>
+            </a:solidFill>
+          </a:ln>
+        </p:spPr>
+        <p:style>
+          <a:lnRef idx="1">
+            <a:schemeClr val="accent1"/>
+          </a:lnRef>
+          <a:fillRef idx="0">
+            <a:schemeClr val="accent1"/>
+          </a:fillRef>
+          <a:effectRef idx="0">
+            <a:schemeClr val="accent1"/>
+          </a:effectRef>
+          <a:fontRef idx="minor">
+            <a:schemeClr val="tx1"/>
+          </a:fontRef>
+        </p:style>
+      </p:cxnSp>
+      <p:cxnSp>
+        <p:nvCxnSpPr>
+          <p:cNvPr id="11" name="Connecteur droit 10"/>
+          <p:cNvCxnSpPr/>
+          <p:nvPr/>
+        </p:nvCxnSpPr>
+        <p:spPr>
+          <a:xfrm>
+            <a:off x="1547664" y="1775878"/>
+            <a:ext cx="0" cy="217616"/>
+          </a:xfrm>
+          <a:prstGeom prst="line">
+            <a:avLst/>
+          </a:prstGeom>
+          <a:ln w="28575">
+            <a:solidFill>
+              <a:srgbClr val="0070C0"/>
+            </a:solidFill>
+          </a:ln>
+        </p:spPr>
+        <p:style>
+          <a:lnRef idx="1">
+            <a:schemeClr val="accent1"/>
+          </a:lnRef>
+          <a:fillRef idx="0">
+            <a:schemeClr val="accent1"/>
+          </a:fillRef>
+          <a:effectRef idx="0">
+            <a:schemeClr val="accent1"/>
+          </a:effectRef>
+          <a:fontRef idx="minor">
+            <a:schemeClr val="tx1"/>
+          </a:fontRef>
+        </p:style>
+      </p:cxnSp>
+      <p:cxnSp>
+        <p:nvCxnSpPr>
+          <p:cNvPr id="14" name="Connecteur droit 13"/>
+          <p:cNvCxnSpPr/>
+          <p:nvPr/>
+        </p:nvCxnSpPr>
+        <p:spPr>
+          <a:xfrm>
+            <a:off x="1457864" y="1775878"/>
+            <a:ext cx="377832" cy="216024"/>
+          </a:xfrm>
+          <a:prstGeom prst="line">
+            <a:avLst/>
+          </a:prstGeom>
+          <a:ln w="28575">
+            <a:solidFill>
+              <a:srgbClr val="0070C0"/>
+            </a:solidFill>
+          </a:ln>
+        </p:spPr>
+        <p:style>
+          <a:lnRef idx="1">
+            <a:schemeClr val="accent1"/>
+          </a:lnRef>
+          <a:fillRef idx="0">
+            <a:schemeClr val="accent1"/>
+          </a:fillRef>
+          <a:effectRef idx="0">
+            <a:schemeClr val="accent1"/>
+          </a:effectRef>
+          <a:fontRef idx="minor">
+            <a:schemeClr val="tx1"/>
+          </a:fontRef>
+        </p:style>
+      </p:cxnSp>
+      <p:cxnSp>
+        <p:nvCxnSpPr>
+          <p:cNvPr id="24" name="Connecteur droit 23"/>
+          <p:cNvCxnSpPr/>
+          <p:nvPr/>
+        </p:nvCxnSpPr>
+        <p:spPr>
+          <a:xfrm>
+            <a:off x="971600" y="1267168"/>
+            <a:ext cx="1800200" cy="0"/>
+          </a:xfrm>
+          <a:prstGeom prst="line">
+            <a:avLst/>
+          </a:prstGeom>
+          <a:ln w="28575">
+            <a:solidFill>
+              <a:srgbClr val="0070C0"/>
+            </a:solidFill>
+          </a:ln>
+        </p:spPr>
+        <p:style>
+          <a:lnRef idx="1">
+            <a:schemeClr val="accent1"/>
+          </a:lnRef>
+          <a:fillRef idx="0">
+            <a:schemeClr val="accent1"/>
+          </a:fillRef>
+          <a:effectRef idx="0">
+            <a:schemeClr val="accent1"/>
+          </a:effectRef>
+          <a:fontRef idx="minor">
+            <a:schemeClr val="tx1"/>
+          </a:fontRef>
+        </p:style>
+      </p:cxnSp>
+      <p:cxnSp>
+        <p:nvCxnSpPr>
+          <p:cNvPr id="27" name="Connecteur droit 26"/>
+          <p:cNvCxnSpPr/>
+          <p:nvPr/>
+        </p:nvCxnSpPr>
+        <p:spPr>
+          <a:xfrm>
+            <a:off x="1816520" y="1987248"/>
+            <a:ext cx="955280" cy="1592"/>
+          </a:xfrm>
+          <a:prstGeom prst="line">
+            <a:avLst/>
+          </a:prstGeom>
+          <a:ln w="28575">
+            <a:solidFill>
+              <a:srgbClr val="0070C0"/>
+            </a:solidFill>
+          </a:ln>
+        </p:spPr>
+        <p:style>
+          <a:lnRef idx="1">
+            <a:schemeClr val="accent1"/>
+          </a:lnRef>
+          <a:fillRef idx="0">
+            <a:schemeClr val="accent1"/>
+          </a:fillRef>
+          <a:effectRef idx="0">
+            <a:schemeClr val="accent1"/>
+          </a:effectRef>
+          <a:fontRef idx="minor">
+            <a:schemeClr val="tx1"/>
+          </a:fontRef>
+        </p:style>
+      </p:cxnSp>
+      <p:cxnSp>
+        <p:nvCxnSpPr>
+          <p:cNvPr id="28" name="Connecteur droit 27"/>
+          <p:cNvCxnSpPr/>
+          <p:nvPr/>
+        </p:nvCxnSpPr>
+        <p:spPr>
+          <a:xfrm>
+            <a:off x="3131840" y="1267168"/>
+            <a:ext cx="360040" cy="0"/>
+          </a:xfrm>
+          <a:prstGeom prst="line">
+            <a:avLst/>
+          </a:prstGeom>
+          <a:ln w="28575">
+            <a:solidFill>
+              <a:srgbClr val="0070C0"/>
+            </a:solidFill>
+          </a:ln>
+        </p:spPr>
+        <p:style>
+          <a:lnRef idx="1">
+            <a:schemeClr val="accent1"/>
+          </a:lnRef>
+          <a:fillRef idx="0">
+            <a:schemeClr val="accent1"/>
+          </a:fillRef>
+          <a:effectRef idx="0">
+            <a:schemeClr val="accent1"/>
+          </a:effectRef>
+          <a:fontRef idx="minor">
+            <a:schemeClr val="tx1"/>
+          </a:fontRef>
+        </p:style>
+      </p:cxnSp>
+      <p:cxnSp>
+        <p:nvCxnSpPr>
+          <p:cNvPr id="29" name="Connecteur droit 28"/>
+          <p:cNvCxnSpPr/>
+          <p:nvPr/>
+        </p:nvCxnSpPr>
+        <p:spPr>
+          <a:xfrm>
+            <a:off x="3131840" y="1988840"/>
+            <a:ext cx="360040" cy="0"/>
+          </a:xfrm>
+          <a:prstGeom prst="line">
+            <a:avLst/>
+          </a:prstGeom>
+          <a:ln w="28575">
+            <a:solidFill>
+              <a:srgbClr val="0070C0"/>
+            </a:solidFill>
+          </a:ln>
+        </p:spPr>
+        <p:style>
+          <a:lnRef idx="1">
+            <a:schemeClr val="accent1"/>
+          </a:lnRef>
+          <a:fillRef idx="0">
+            <a:schemeClr val="accent1"/>
+          </a:fillRef>
+          <a:effectRef idx="0">
+            <a:schemeClr val="accent1"/>
+          </a:effectRef>
+          <a:fontRef idx="minor">
+            <a:schemeClr val="tx1"/>
+          </a:fontRef>
+        </p:style>
+      </p:cxnSp>
+      <p:cxnSp>
+        <p:nvCxnSpPr>
+          <p:cNvPr id="30" name="Connecteur droit 29"/>
+          <p:cNvCxnSpPr/>
+          <p:nvPr/>
+        </p:nvCxnSpPr>
+        <p:spPr>
+          <a:xfrm flipV="1">
+            <a:off x="3491880" y="1267168"/>
+            <a:ext cx="0" cy="720080"/>
+          </a:xfrm>
+          <a:prstGeom prst="line">
+            <a:avLst/>
+          </a:prstGeom>
+          <a:ln w="28575">
+            <a:solidFill>
+              <a:srgbClr val="0070C0"/>
+            </a:solidFill>
+          </a:ln>
+        </p:spPr>
+        <p:style>
+          <a:lnRef idx="1">
+            <a:schemeClr val="accent1"/>
+          </a:lnRef>
+          <a:fillRef idx="0">
+            <a:schemeClr val="accent1"/>
+          </a:fillRef>
+          <a:effectRef idx="0">
+            <a:schemeClr val="accent1"/>
+          </a:effectRef>
+          <a:fontRef idx="minor">
+            <a:schemeClr val="tx1"/>
+          </a:fontRef>
+        </p:style>
+      </p:cxnSp>
+      <p:cxnSp>
+        <p:nvCxnSpPr>
+          <p:cNvPr id="31" name="Connecteur droit 30"/>
+          <p:cNvCxnSpPr/>
+          <p:nvPr/>
+        </p:nvCxnSpPr>
+        <p:spPr>
+          <a:xfrm flipH="1">
+            <a:off x="2771800" y="1268760"/>
+            <a:ext cx="360040" cy="144016"/>
+          </a:xfrm>
+          <a:prstGeom prst="line">
+            <a:avLst/>
+          </a:prstGeom>
+          <a:ln w="28575">
+            <a:solidFill>
+              <a:srgbClr val="0070C0"/>
+            </a:solidFill>
+          </a:ln>
+        </p:spPr>
+        <p:style>
+          <a:lnRef idx="1">
+            <a:schemeClr val="accent1"/>
+          </a:lnRef>
+          <a:fillRef idx="0">
+            <a:schemeClr val="accent1"/>
+          </a:fillRef>
+          <a:effectRef idx="0">
+            <a:schemeClr val="accent1"/>
+          </a:effectRef>
+          <a:fontRef idx="minor">
+            <a:schemeClr val="tx1"/>
+          </a:fontRef>
+        </p:style>
+      </p:cxnSp>
+      <p:cxnSp>
+        <p:nvCxnSpPr>
+          <p:cNvPr id="34" name="Connecteur droit 33"/>
+          <p:cNvCxnSpPr/>
+          <p:nvPr/>
+        </p:nvCxnSpPr>
+        <p:spPr>
+          <a:xfrm flipH="1">
+            <a:off x="2775655" y="1987248"/>
+            <a:ext cx="360040" cy="144016"/>
+          </a:xfrm>
+          <a:prstGeom prst="line">
+            <a:avLst/>
+          </a:prstGeom>
+          <a:ln w="28575">
+            <a:solidFill>
+              <a:srgbClr val="0070C0"/>
+            </a:solidFill>
+          </a:ln>
+        </p:spPr>
+        <p:style>
+          <a:lnRef idx="1">
+            <a:schemeClr val="accent1"/>
+          </a:lnRef>
+          <a:fillRef idx="0">
+            <a:schemeClr val="accent1"/>
+          </a:fillRef>
+          <a:effectRef idx="0">
+            <a:schemeClr val="accent1"/>
+          </a:effectRef>
+          <a:fontRef idx="minor">
+            <a:schemeClr val="tx1"/>
+          </a:fontRef>
+        </p:style>
+      </p:cxnSp>
+      <p:cxnSp>
+        <p:nvCxnSpPr>
+          <p:cNvPr id="35" name="Connecteur droit 34"/>
+          <p:cNvCxnSpPr/>
+          <p:nvPr/>
+        </p:nvCxnSpPr>
+        <p:spPr>
+          <a:xfrm>
+            <a:off x="3491880" y="1607079"/>
+            <a:ext cx="381380" cy="0"/>
+          </a:xfrm>
+          <a:prstGeom prst="line">
+            <a:avLst/>
+          </a:prstGeom>
+          <a:ln w="28575">
+            <a:solidFill>
+              <a:srgbClr val="0070C0"/>
+            </a:solidFill>
+          </a:ln>
+        </p:spPr>
+        <p:style>
+          <a:lnRef idx="1">
+            <a:schemeClr val="accent1"/>
+          </a:lnRef>
+          <a:fillRef idx="0">
+            <a:schemeClr val="accent1"/>
+          </a:fillRef>
+          <a:effectRef idx="0">
+            <a:schemeClr val="accent1"/>
+          </a:effectRef>
+          <a:fontRef idx="minor">
+            <a:schemeClr val="tx1"/>
+          </a:fontRef>
+        </p:style>
+      </p:cxnSp>
+      <p:sp>
+        <p:nvSpPr>
+          <p:cNvPr id="37" name="Rectangle 36"/>
+          <p:cNvSpPr/>
+          <p:nvPr/>
+        </p:nvSpPr>
+        <p:spPr>
+          <a:xfrm>
+            <a:off x="3873260" y="1320639"/>
+            <a:ext cx="269462" cy="572880"/>
+          </a:xfrm>
+          <a:prstGeom prst="rect">
+            <a:avLst/>
+          </a:prstGeom>
+          <a:ln w="28575">
+            <a:solidFill>
+              <a:srgbClr val="0070C0"/>
+            </a:solidFill>
+          </a:ln>
+        </p:spPr>
+        <p:style>
+          <a:lnRef idx="1">
+            <a:schemeClr val="accent1"/>
+          </a:lnRef>
+          <a:fillRef idx="0">
+            <a:schemeClr val="accent1"/>
+          </a:fillRef>
+          <a:effectRef idx="0">
+            <a:schemeClr val="accent1"/>
+          </a:effectRef>
+          <a:fontRef idx="minor">
+            <a:schemeClr val="tx1"/>
+          </a:fontRef>
+        </p:style>
+        <p:txBody>
+          <a:bodyPr rtlCol="0" anchor="ctr"/>
+          <a:lstStyle/>
+          <a:p>
+            <a:pPr algn="ctr"/>
+            <a:endParaRPr lang="fr-FR"/>
+          </a:p>
+        </p:txBody>
+      </p:sp>
+      <p:cxnSp>
+        <p:nvCxnSpPr>
+          <p:cNvPr id="38" name="Connecteur droit 37"/>
+          <p:cNvCxnSpPr/>
+          <p:nvPr/>
+        </p:nvCxnSpPr>
+        <p:spPr>
+          <a:xfrm flipH="1" flipV="1">
+            <a:off x="3873260" y="1412777"/>
+            <a:ext cx="269462" cy="346702"/>
+          </a:xfrm>
+          <a:prstGeom prst="line">
+            <a:avLst/>
+          </a:prstGeom>
+          <a:ln w="28575">
+            <a:solidFill>
+              <a:srgbClr val="0070C0"/>
+            </a:solidFill>
+          </a:ln>
+        </p:spPr>
+        <p:style>
+          <a:lnRef idx="1">
+            <a:schemeClr val="accent1"/>
+          </a:lnRef>
+          <a:fillRef idx="0">
+            <a:schemeClr val="accent1"/>
+          </a:fillRef>
+          <a:effectRef idx="0">
+            <a:schemeClr val="accent1"/>
+          </a:effectRef>
+          <a:fontRef idx="minor">
+            <a:schemeClr val="tx1"/>
+          </a:fontRef>
+        </p:style>
+      </p:cxnSp>
+      <p:cxnSp>
+        <p:nvCxnSpPr>
+          <p:cNvPr id="41" name="Connecteur droit 40"/>
+          <p:cNvCxnSpPr/>
+          <p:nvPr/>
+        </p:nvCxnSpPr>
+        <p:spPr>
+          <a:xfrm>
+            <a:off x="4142722" y="1607079"/>
+            <a:ext cx="418452" cy="0"/>
+          </a:xfrm>
+          <a:prstGeom prst="line">
+            <a:avLst/>
+          </a:prstGeom>
+          <a:ln w="28575">
+            <a:solidFill>
+              <a:srgbClr val="0070C0"/>
+            </a:solidFill>
+          </a:ln>
+        </p:spPr>
+        <p:style>
+          <a:lnRef idx="1">
+            <a:schemeClr val="accent1"/>
+          </a:lnRef>
+          <a:fillRef idx="0">
+            <a:schemeClr val="accent1"/>
+          </a:fillRef>
+          <a:effectRef idx="0">
+            <a:schemeClr val="accent1"/>
+          </a:effectRef>
+          <a:fontRef idx="minor">
+            <a:schemeClr val="tx1"/>
+          </a:fontRef>
+        </p:style>
+      </p:cxnSp>
+      <p:cxnSp>
+        <p:nvCxnSpPr>
+          <p:cNvPr id="42" name="Connecteur droit 41"/>
+          <p:cNvCxnSpPr/>
+          <p:nvPr/>
+        </p:nvCxnSpPr>
+        <p:spPr>
+          <a:xfrm flipV="1">
+            <a:off x="4561174" y="1247039"/>
+            <a:ext cx="0" cy="720080"/>
+          </a:xfrm>
+          <a:prstGeom prst="line">
+            <a:avLst/>
+          </a:prstGeom>
+          <a:ln w="28575">
+            <a:solidFill>
+              <a:srgbClr val="0070C0"/>
+            </a:solidFill>
+          </a:ln>
+        </p:spPr>
+        <p:style>
+          <a:lnRef idx="1">
+            <a:schemeClr val="accent1"/>
+          </a:lnRef>
+          <a:fillRef idx="0">
+            <a:schemeClr val="accent1"/>
+          </a:fillRef>
+          <a:effectRef idx="0">
+            <a:schemeClr val="accent1"/>
+          </a:effectRef>
+          <a:fontRef idx="minor">
+            <a:schemeClr val="tx1"/>
+          </a:fontRef>
+        </p:style>
+      </p:cxnSp>
+      <mc:AlternateContent xmlns:mc="http://schemas.openxmlformats.org/markup-compatibility/2006" xmlns:a14="http://schemas.microsoft.com/office/drawing/2010/main">
+        <mc:Choice Requires="a14">
+          <p:sp>
+            <p:nvSpPr>
+              <p:cNvPr id="45" name="ZoneTexte 44"/>
+              <p:cNvSpPr txBox="1"/>
+              <p:nvPr/>
+            </p:nvSpPr>
+            <p:spPr>
+              <a:xfrm>
+                <a:off x="1507208" y="2143682"/>
+                <a:ext cx="328488" cy="307777"/>
+              </a:xfrm>
+              <a:prstGeom prst="rect">
+                <a:avLst/>
+              </a:prstGeom>
+              <a:noFill/>
+            </p:spPr>
+            <p:txBody>
+              <a:bodyPr wrap="none" rtlCol="0">
+                <a:spAutoFit/>
+              </a:bodyPr>
+              <a:lstStyle/>
+              <a:p>
+                <a:pPr/>
+                <a14:m>
+                  <m:oMathPara xmlns:m="http://schemas.openxmlformats.org/officeDocument/2006/math">
+                    <m:oMathParaPr>
+                      <m:jc m:val="centerGroup"/>
+                    </m:oMathParaPr>
+                    <m:oMath xmlns:m="http://schemas.openxmlformats.org/officeDocument/2006/math">
+                      <m:acc>
+                        <m:accPr>
+                          <m:chr m:val="̅"/>
+                          <m:ctrlPr>
+                            <a:rPr lang="fr-FR" sz="1400" i="1" smtClean="0">
+                              <a:latin typeface="Cambria Math" panose="02040503050406030204" pitchFamily="18" charset="0"/>
+                            </a:rPr>
+                          </m:ctrlPr>
+                        </m:accPr>
+                        <m:e>
+                          <m:r>
+                            <a:rPr lang="fr-FR" sz="1400" b="0" i="1" smtClean="0">
+                              <a:latin typeface="Cambria Math"/>
+                            </a:rPr>
+                            <m:t>𝑎</m:t>
+                          </m:r>
+                        </m:e>
+                      </m:acc>
+                    </m:oMath>
+                  </m:oMathPara>
+                </a14:m>
+                <a:endParaRPr lang="fr-FR" dirty="0"/>
+              </a:p>
+            </p:txBody>
+          </p:sp>
+        </mc:Choice>
+        <mc:Fallback xmlns="">
+          <p:sp>
+            <p:nvSpPr>
+              <p:cNvPr id="45" name="ZoneTexte 44"/>
+              <p:cNvSpPr txBox="1">
+                <a:spLocks noRot="1" noChangeAspect="1" noMove="1" noResize="1" noEditPoints="1" noAdjustHandles="1" noChangeArrowheads="1" noChangeShapeType="1" noTextEdit="1"/>
+              </p:cNvSpPr>
+              <p:nvPr/>
+            </p:nvSpPr>
+            <p:spPr>
+              <a:xfrm>
+                <a:off x="1507208" y="2143682"/>
+                <a:ext cx="328488" cy="307777"/>
+              </a:xfrm>
+              <a:prstGeom prst="rect">
+                <a:avLst/>
+              </a:prstGeom>
+              <a:blipFill rotWithShape="1">
+                <a:blip r:embed="rId2"/>
+                <a:stretch>
+                  <a:fillRect/>
+                </a:stretch>
+              </a:blipFill>
+            </p:spPr>
+            <p:txBody>
+              <a:bodyPr/>
+              <a:lstStyle/>
+              <a:p>
+                <a:r>
+                  <a:rPr lang="fr-FR">
+                    <a:noFill/>
+                  </a:rPr>
+                  <a:t> </a:t>
+                </a:r>
+              </a:p>
+            </p:txBody>
+          </p:sp>
+        </mc:Fallback>
+      </mc:AlternateContent>
+      <mc:AlternateContent xmlns:mc="http://schemas.openxmlformats.org/markup-compatibility/2006" xmlns:a14="http://schemas.microsoft.com/office/drawing/2010/main">
+        <mc:Choice Requires="a14">
+          <p:sp>
+            <p:nvSpPr>
+              <p:cNvPr id="46" name="ZoneTexte 45"/>
+              <p:cNvSpPr txBox="1"/>
+              <p:nvPr/>
+            </p:nvSpPr>
+            <p:spPr>
+              <a:xfrm>
+                <a:off x="2791431" y="904827"/>
+                <a:ext cx="378502" cy="307777"/>
+              </a:xfrm>
+              <a:prstGeom prst="rect">
+                <a:avLst/>
+              </a:prstGeom>
+              <a:noFill/>
+            </p:spPr>
+            <p:txBody>
+              <a:bodyPr wrap="none" rtlCol="0">
+                <a:spAutoFit/>
+              </a:bodyPr>
+              <a:lstStyle/>
+              <a:p>
+                <a:pPr/>
+                <a14:m>
+                  <m:oMathPara xmlns:m="http://schemas.openxmlformats.org/officeDocument/2006/math">
+                    <m:oMathParaPr>
+                      <m:jc m:val="centerGroup"/>
+                    </m:oMathParaPr>
+                    <m:oMath xmlns:m="http://schemas.openxmlformats.org/officeDocument/2006/math">
+                      <m:r>
+                        <a:rPr lang="fr-FR" sz="1400" b="0" i="1" smtClean="0">
+                          <a:latin typeface="Cambria Math"/>
+                        </a:rPr>
+                        <m:t>𝑚</m:t>
+                      </m:r>
+                    </m:oMath>
+                  </m:oMathPara>
+                </a14:m>
+                <a:endParaRPr lang="fr-FR" dirty="0"/>
+              </a:p>
+            </p:txBody>
+          </p:sp>
+        </mc:Choice>
+        <mc:Fallback xmlns="">
+          <p:sp>
+            <p:nvSpPr>
+              <p:cNvPr id="46" name="ZoneTexte 45"/>
+              <p:cNvSpPr txBox="1">
+                <a:spLocks noRot="1" noChangeAspect="1" noMove="1" noResize="1" noEditPoints="1" noAdjustHandles="1" noChangeArrowheads="1" noChangeShapeType="1" noTextEdit="1"/>
+              </p:cNvSpPr>
+              <p:nvPr/>
+            </p:nvSpPr>
+            <p:spPr>
+              <a:xfrm>
+                <a:off x="2791431" y="904827"/>
+                <a:ext cx="378502" cy="307777"/>
+              </a:xfrm>
+              <a:prstGeom prst="rect">
+                <a:avLst/>
+              </a:prstGeom>
+              <a:blipFill rotWithShape="1">
+                <a:blip r:embed="rId3"/>
+                <a:stretch>
+                  <a:fillRect/>
+                </a:stretch>
+              </a:blipFill>
+            </p:spPr>
+            <p:txBody>
+              <a:bodyPr/>
+              <a:lstStyle/>
+              <a:p>
+                <a:r>
+                  <a:rPr lang="fr-FR">
+                    <a:noFill/>
+                  </a:rPr>
+                  <a:t> </a:t>
+                </a:r>
+              </a:p>
+            </p:txBody>
+          </p:sp>
+        </mc:Fallback>
+      </mc:AlternateContent>
+      <mc:AlternateContent xmlns:mc="http://schemas.openxmlformats.org/markup-compatibility/2006" xmlns:a14="http://schemas.microsoft.com/office/drawing/2010/main">
+        <mc:Choice Requires="a14">
+          <p:sp>
+            <p:nvSpPr>
+              <p:cNvPr id="47" name="ZoneTexte 46"/>
+              <p:cNvSpPr txBox="1"/>
+              <p:nvPr/>
+            </p:nvSpPr>
+            <p:spPr>
+              <a:xfrm>
+                <a:off x="2956164" y="1709484"/>
+                <a:ext cx="326371" cy="307777"/>
+              </a:xfrm>
+              <a:prstGeom prst="rect">
+                <a:avLst/>
+              </a:prstGeom>
+              <a:noFill/>
+            </p:spPr>
+            <p:txBody>
+              <a:bodyPr wrap="none" rtlCol="0">
+                <a:spAutoFit/>
+              </a:bodyPr>
+              <a:lstStyle/>
+              <a:p>
+                <a:pPr/>
+                <a14:m>
+                  <m:oMathPara xmlns:m="http://schemas.openxmlformats.org/officeDocument/2006/math">
+                    <m:oMathParaPr>
+                      <m:jc m:val="centerGroup"/>
+                    </m:oMathParaPr>
+                    <m:oMath xmlns:m="http://schemas.openxmlformats.org/officeDocument/2006/math">
+                      <m:r>
+                        <a:rPr lang="fr-FR" sz="1400" b="0" i="1" smtClean="0">
+                          <a:latin typeface="Cambria Math"/>
+                        </a:rPr>
+                        <m:t>𝑥</m:t>
+                      </m:r>
+                    </m:oMath>
+                  </m:oMathPara>
+                </a14:m>
+                <a:endParaRPr lang="fr-FR" dirty="0"/>
+              </a:p>
+            </p:txBody>
+          </p:sp>
+        </mc:Choice>
+        <mc:Fallback xmlns="">
+          <p:sp>
+            <p:nvSpPr>
+              <p:cNvPr id="47" name="ZoneTexte 46"/>
+              <p:cNvSpPr txBox="1">
+                <a:spLocks noRot="1" noChangeAspect="1" noMove="1" noResize="1" noEditPoints="1" noAdjustHandles="1" noChangeArrowheads="1" noChangeShapeType="1" noTextEdit="1"/>
+              </p:cNvSpPr>
+              <p:nvPr/>
+            </p:nvSpPr>
+            <p:spPr>
+              <a:xfrm>
+                <a:off x="2956164" y="1709484"/>
+                <a:ext cx="326371" cy="307777"/>
+              </a:xfrm>
+              <a:prstGeom prst="rect">
+                <a:avLst/>
+              </a:prstGeom>
+              <a:blipFill rotWithShape="1">
+                <a:blip r:embed="rId4"/>
+                <a:stretch>
+                  <a:fillRect/>
+                </a:stretch>
+              </a:blipFill>
+            </p:spPr>
+            <p:txBody>
+              <a:bodyPr/>
+              <a:lstStyle/>
+              <a:p>
+                <a:r>
+                  <a:rPr lang="fr-FR">
+                    <a:noFill/>
+                  </a:rPr>
+                  <a:t> </a:t>
+                </a:r>
+              </a:p>
+            </p:txBody>
+          </p:sp>
+        </mc:Fallback>
+      </mc:AlternateContent>
+      <p:cxnSp>
+        <p:nvCxnSpPr>
+          <p:cNvPr id="48" name="Connecteur droit 47"/>
+          <p:cNvCxnSpPr/>
+          <p:nvPr/>
+        </p:nvCxnSpPr>
+        <p:spPr>
+          <a:xfrm flipV="1">
+            <a:off x="971600" y="2348880"/>
+            <a:ext cx="0" cy="720080"/>
+          </a:xfrm>
+          <a:prstGeom prst="line">
+            <a:avLst/>
+          </a:prstGeom>
+          <a:ln w="28575">
+            <a:solidFill>
+              <a:srgbClr val="0070C0"/>
+            </a:solidFill>
+          </a:ln>
+        </p:spPr>
+        <p:style>
+          <a:lnRef idx="1">
+            <a:schemeClr val="accent1"/>
+          </a:lnRef>
+          <a:fillRef idx="0">
+            <a:schemeClr val="accent1"/>
+          </a:fillRef>
+          <a:effectRef idx="0">
+            <a:schemeClr val="accent1"/>
+          </a:effectRef>
+          <a:fontRef idx="minor">
+            <a:schemeClr val="tx1"/>
+          </a:fontRef>
+        </p:style>
+      </p:cxnSp>
+      <p:cxnSp>
+        <p:nvCxnSpPr>
+          <p:cNvPr id="49" name="Connecteur droit 48"/>
+          <p:cNvCxnSpPr/>
+          <p:nvPr/>
+        </p:nvCxnSpPr>
+        <p:spPr>
+          <a:xfrm flipV="1">
+            <a:off x="4561174" y="2348880"/>
+            <a:ext cx="0" cy="720080"/>
+          </a:xfrm>
+          <a:prstGeom prst="line">
+            <a:avLst/>
+          </a:prstGeom>
+          <a:ln w="28575">
+            <a:solidFill>
+              <a:srgbClr val="0070C0"/>
+            </a:solidFill>
+          </a:ln>
+        </p:spPr>
+        <p:style>
+          <a:lnRef idx="1">
+            <a:schemeClr val="accent1"/>
+          </a:lnRef>
+          <a:fillRef idx="0">
+            <a:schemeClr val="accent1"/>
+          </a:fillRef>
+          <a:effectRef idx="0">
+            <a:schemeClr val="accent1"/>
+          </a:effectRef>
+          <a:fontRef idx="minor">
+            <a:schemeClr val="tx1"/>
+          </a:fontRef>
+        </p:style>
+      </p:cxnSp>
+      <p:cxnSp>
+        <p:nvCxnSpPr>
+          <p:cNvPr id="50" name="Connecteur droit 49"/>
+          <p:cNvCxnSpPr/>
+          <p:nvPr/>
+        </p:nvCxnSpPr>
+        <p:spPr>
+          <a:xfrm>
+            <a:off x="2980682" y="1340768"/>
+            <a:ext cx="0" cy="245360"/>
+          </a:xfrm>
+          <a:prstGeom prst="line">
+            <a:avLst/>
+          </a:prstGeom>
+          <a:ln w="28575">
+            <a:solidFill>
+              <a:srgbClr val="0070C0"/>
+            </a:solidFill>
+            <a:prstDash val="sysDash"/>
+          </a:ln>
+        </p:spPr>
+        <p:style>
+          <a:lnRef idx="1">
+            <a:schemeClr val="accent1"/>
+          </a:lnRef>
+          <a:fillRef idx="0">
+            <a:schemeClr val="accent1"/>
+          </a:fillRef>
+          <a:effectRef idx="0">
+            <a:schemeClr val="accent1"/>
+          </a:effectRef>
+          <a:fontRef idx="minor">
+            <a:schemeClr val="tx1"/>
+          </a:fontRef>
+        </p:style>
+      </p:cxnSp>
+      <p:cxnSp>
+        <p:nvCxnSpPr>
+          <p:cNvPr id="53" name="Connecteur droit 52"/>
+          <p:cNvCxnSpPr/>
+          <p:nvPr/>
+        </p:nvCxnSpPr>
+        <p:spPr>
+          <a:xfrm>
+            <a:off x="2855841" y="1579391"/>
+            <a:ext cx="249681" cy="0"/>
+          </a:xfrm>
+          <a:prstGeom prst="line">
+            <a:avLst/>
+          </a:prstGeom>
+          <a:ln w="28575">
+            <a:solidFill>
+              <a:srgbClr val="0070C0"/>
+            </a:solidFill>
+          </a:ln>
+        </p:spPr>
+        <p:style>
+          <a:lnRef idx="1">
+            <a:schemeClr val="accent1"/>
+          </a:lnRef>
+          <a:fillRef idx="0">
+            <a:schemeClr val="accent1"/>
+          </a:fillRef>
+          <a:effectRef idx="0">
+            <a:schemeClr val="accent1"/>
+          </a:effectRef>
+          <a:fontRef idx="minor">
+            <a:schemeClr val="tx1"/>
+          </a:fontRef>
+        </p:style>
+      </p:cxnSp>
+      <p:cxnSp>
+        <p:nvCxnSpPr>
+          <p:cNvPr id="55" name="Connecteur droit 54"/>
+          <p:cNvCxnSpPr/>
+          <p:nvPr/>
+        </p:nvCxnSpPr>
+        <p:spPr>
+          <a:xfrm>
+            <a:off x="3093262" y="1470072"/>
+            <a:ext cx="0" cy="115943"/>
+          </a:xfrm>
+          <a:prstGeom prst="line">
+            <a:avLst/>
+          </a:prstGeom>
+          <a:ln w="28575">
+            <a:solidFill>
+              <a:srgbClr val="0070C0"/>
+            </a:solidFill>
+          </a:ln>
+        </p:spPr>
+        <p:style>
+          <a:lnRef idx="1">
+            <a:schemeClr val="accent1"/>
+          </a:lnRef>
+          <a:fillRef idx="0">
+            <a:schemeClr val="accent1"/>
+          </a:fillRef>
+          <a:effectRef idx="0">
+            <a:schemeClr val="accent1"/>
+          </a:effectRef>
+          <a:fontRef idx="minor">
+            <a:schemeClr val="tx1"/>
+          </a:fontRef>
+        </p:style>
+      </p:cxnSp>
+      <p:cxnSp>
+        <p:nvCxnSpPr>
+          <p:cNvPr id="58" name="Connecteur droit 57"/>
+          <p:cNvCxnSpPr/>
+          <p:nvPr/>
+        </p:nvCxnSpPr>
+        <p:spPr>
+          <a:xfrm>
+            <a:off x="2868912" y="1471672"/>
+            <a:ext cx="0" cy="115943"/>
+          </a:xfrm>
+          <a:prstGeom prst="line">
+            <a:avLst/>
+          </a:prstGeom>
+          <a:ln w="28575">
+            <a:solidFill>
+              <a:srgbClr val="0070C0"/>
+            </a:solidFill>
+          </a:ln>
+        </p:spPr>
+        <p:style>
+          <a:lnRef idx="1">
+            <a:schemeClr val="accent1"/>
+          </a:lnRef>
+          <a:fillRef idx="0">
+            <a:schemeClr val="accent1"/>
+          </a:fillRef>
+          <a:effectRef idx="0">
+            <a:schemeClr val="accent1"/>
+          </a:effectRef>
+          <a:fontRef idx="minor">
+            <a:schemeClr val="tx1"/>
+          </a:fontRef>
+        </p:style>
+      </p:cxnSp>
+      <p:cxnSp>
+        <p:nvCxnSpPr>
+          <p:cNvPr id="59" name="Connecteur droit 58"/>
+          <p:cNvCxnSpPr/>
+          <p:nvPr/>
+        </p:nvCxnSpPr>
+        <p:spPr>
+          <a:xfrm>
+            <a:off x="1691680" y="1920865"/>
+            <a:ext cx="0" cy="245360"/>
+          </a:xfrm>
+          <a:prstGeom prst="line">
+            <a:avLst/>
+          </a:prstGeom>
+          <a:ln w="28575">
+            <a:solidFill>
+              <a:srgbClr val="0070C0"/>
+            </a:solidFill>
+            <a:prstDash val="sysDash"/>
+          </a:ln>
+        </p:spPr>
+        <p:style>
+          <a:lnRef idx="1">
+            <a:schemeClr val="accent1"/>
+          </a:lnRef>
+          <a:fillRef idx="0">
+            <a:schemeClr val="accent1"/>
+          </a:fillRef>
+          <a:effectRef idx="0">
+            <a:schemeClr val="accent1"/>
+          </a:effectRef>
+          <a:fontRef idx="minor">
+            <a:schemeClr val="tx1"/>
+          </a:fontRef>
+        </p:style>
+      </p:cxnSp>
+      <p:cxnSp>
+        <p:nvCxnSpPr>
+          <p:cNvPr id="60" name="Connecteur droit 59"/>
+          <p:cNvCxnSpPr/>
+          <p:nvPr/>
+        </p:nvCxnSpPr>
+        <p:spPr>
+          <a:xfrm>
+            <a:off x="1566839" y="2159488"/>
+            <a:ext cx="249681" cy="0"/>
+          </a:xfrm>
+          <a:prstGeom prst="line">
+            <a:avLst/>
+          </a:prstGeom>
+          <a:ln w="28575">
+            <a:solidFill>
+              <a:srgbClr val="0070C0"/>
+            </a:solidFill>
+          </a:ln>
+        </p:spPr>
+        <p:style>
+          <a:lnRef idx="1">
+            <a:schemeClr val="accent1"/>
+          </a:lnRef>
+          <a:fillRef idx="0">
+            <a:schemeClr val="accent1"/>
+          </a:fillRef>
+          <a:effectRef idx="0">
+            <a:schemeClr val="accent1"/>
+          </a:effectRef>
+          <a:fontRef idx="minor">
+            <a:schemeClr val="tx1"/>
+          </a:fontRef>
+        </p:style>
+      </p:cxnSp>
+      <p:cxnSp>
+        <p:nvCxnSpPr>
+          <p:cNvPr id="61" name="Connecteur droit 60"/>
+          <p:cNvCxnSpPr/>
+          <p:nvPr/>
+        </p:nvCxnSpPr>
+        <p:spPr>
+          <a:xfrm>
+            <a:off x="1804260" y="2050169"/>
+            <a:ext cx="0" cy="115943"/>
+          </a:xfrm>
+          <a:prstGeom prst="line">
+            <a:avLst/>
+          </a:prstGeom>
+          <a:ln w="28575">
+            <a:solidFill>
+              <a:srgbClr val="0070C0"/>
+            </a:solidFill>
+          </a:ln>
+        </p:spPr>
+        <p:style>
+          <a:lnRef idx="1">
+            <a:schemeClr val="accent1"/>
+          </a:lnRef>
+          <a:fillRef idx="0">
+            <a:schemeClr val="accent1"/>
+          </a:fillRef>
+          <a:effectRef idx="0">
+            <a:schemeClr val="accent1"/>
+          </a:effectRef>
+          <a:fontRef idx="minor">
+            <a:schemeClr val="tx1"/>
+          </a:fontRef>
+        </p:style>
+      </p:cxnSp>
+      <p:cxnSp>
+        <p:nvCxnSpPr>
+          <p:cNvPr id="62" name="Connecteur droit 61"/>
+          <p:cNvCxnSpPr/>
+          <p:nvPr/>
+        </p:nvCxnSpPr>
+        <p:spPr>
+          <a:xfrm>
+            <a:off x="1579910" y="2051769"/>
+            <a:ext cx="0" cy="115943"/>
+          </a:xfrm>
+          <a:prstGeom prst="line">
+            <a:avLst/>
+          </a:prstGeom>
+          <a:ln w="28575">
+            <a:solidFill>
+              <a:srgbClr val="0070C0"/>
+            </a:solidFill>
+          </a:ln>
+        </p:spPr>
+        <p:style>
+          <a:lnRef idx="1">
+            <a:schemeClr val="accent1"/>
+          </a:lnRef>
+          <a:fillRef idx="0">
+            <a:schemeClr val="accent1"/>
+          </a:fillRef>
+          <a:effectRef idx="0">
+            <a:schemeClr val="accent1"/>
+          </a:effectRef>
+          <a:fontRef idx="minor">
+            <a:schemeClr val="tx1"/>
+          </a:fontRef>
+        </p:style>
+      </p:cxnSp>
+      <p:cxnSp>
+        <p:nvCxnSpPr>
+          <p:cNvPr id="63" name="Connecteur droit 62"/>
+          <p:cNvCxnSpPr/>
+          <p:nvPr/>
+        </p:nvCxnSpPr>
+        <p:spPr>
+          <a:xfrm>
+            <a:off x="971600" y="2708920"/>
+            <a:ext cx="1800200" cy="0"/>
+          </a:xfrm>
+          <a:prstGeom prst="line">
+            <a:avLst/>
+          </a:prstGeom>
+          <a:ln w="28575">
+            <a:solidFill>
+              <a:srgbClr val="0070C0"/>
+            </a:solidFill>
+          </a:ln>
+        </p:spPr>
+        <p:style>
+          <a:lnRef idx="1">
+            <a:schemeClr val="accent1"/>
+          </a:lnRef>
+          <a:fillRef idx="0">
+            <a:schemeClr val="accent1"/>
+          </a:fillRef>
+          <a:effectRef idx="0">
+            <a:schemeClr val="accent1"/>
+          </a:effectRef>
+          <a:fontRef idx="minor">
+            <a:schemeClr val="tx1"/>
+          </a:fontRef>
+        </p:style>
+      </p:cxnSp>
+      <p:cxnSp>
+        <p:nvCxnSpPr>
+          <p:cNvPr id="64" name="Connecteur droit 63"/>
+          <p:cNvCxnSpPr/>
+          <p:nvPr/>
+        </p:nvCxnSpPr>
+        <p:spPr>
+          <a:xfrm>
+            <a:off x="3131840" y="2708920"/>
+            <a:ext cx="712543" cy="0"/>
+          </a:xfrm>
+          <a:prstGeom prst="line">
+            <a:avLst/>
+          </a:prstGeom>
+          <a:ln w="28575">
+            <a:solidFill>
+              <a:srgbClr val="0070C0"/>
+            </a:solidFill>
+          </a:ln>
+        </p:spPr>
+        <p:style>
+          <a:lnRef idx="1">
+            <a:schemeClr val="accent1"/>
+          </a:lnRef>
+          <a:fillRef idx="0">
+            <a:schemeClr val="accent1"/>
+          </a:fillRef>
+          <a:effectRef idx="0">
+            <a:schemeClr val="accent1"/>
+          </a:effectRef>
+          <a:fontRef idx="minor">
+            <a:schemeClr val="tx1"/>
+          </a:fontRef>
+        </p:style>
+      </p:cxnSp>
+      <p:cxnSp>
+        <p:nvCxnSpPr>
+          <p:cNvPr id="65" name="Connecteur droit 64"/>
+          <p:cNvCxnSpPr/>
+          <p:nvPr/>
+        </p:nvCxnSpPr>
+        <p:spPr>
+          <a:xfrm flipH="1">
+            <a:off x="2775655" y="2707328"/>
+            <a:ext cx="360040" cy="144016"/>
+          </a:xfrm>
+          <a:prstGeom prst="line">
+            <a:avLst/>
+          </a:prstGeom>
+          <a:ln w="28575">
+            <a:solidFill>
+              <a:srgbClr val="0070C0"/>
+            </a:solidFill>
+          </a:ln>
+        </p:spPr>
+        <p:style>
+          <a:lnRef idx="1">
+            <a:schemeClr val="accent1"/>
+          </a:lnRef>
+          <a:fillRef idx="0">
+            <a:schemeClr val="accent1"/>
+          </a:fillRef>
+          <a:effectRef idx="0">
+            <a:schemeClr val="accent1"/>
+          </a:effectRef>
+          <a:fontRef idx="minor">
+            <a:schemeClr val="tx1"/>
+          </a:fontRef>
+        </p:style>
+      </p:cxnSp>
+      <mc:AlternateContent xmlns:mc="http://schemas.openxmlformats.org/markup-compatibility/2006" xmlns:a14="http://schemas.microsoft.com/office/drawing/2010/main">
+        <mc:Choice Requires="a14">
+          <p:sp>
+            <p:nvSpPr>
+              <p:cNvPr id="66" name="ZoneTexte 65"/>
+              <p:cNvSpPr txBox="1"/>
+              <p:nvPr/>
+            </p:nvSpPr>
+            <p:spPr>
+              <a:xfrm>
+                <a:off x="2955675" y="2401143"/>
+                <a:ext cx="326371" cy="307777"/>
+              </a:xfrm>
+              <a:prstGeom prst="rect">
+                <a:avLst/>
+              </a:prstGeom>
+              <a:noFill/>
+            </p:spPr>
+            <p:txBody>
+              <a:bodyPr wrap="none" rtlCol="0">
+                <a:spAutoFit/>
+              </a:bodyPr>
+              <a:lstStyle/>
+              <a:p>
+                <a:pPr/>
+                <a14:m>
+                  <m:oMathPara xmlns:m="http://schemas.openxmlformats.org/officeDocument/2006/math">
+                    <m:oMathParaPr>
+                      <m:jc m:val="centerGroup"/>
+                    </m:oMathParaPr>
+                    <m:oMath xmlns:m="http://schemas.openxmlformats.org/officeDocument/2006/math">
+                      <m:r>
+                        <a:rPr lang="fr-FR" sz="1400" b="0" i="1" smtClean="0">
+                          <a:latin typeface="Cambria Math"/>
+                        </a:rPr>
+                        <m:t>𝑥</m:t>
+                      </m:r>
+                    </m:oMath>
+                  </m:oMathPara>
+                </a14:m>
+                <a:endParaRPr lang="fr-FR" dirty="0"/>
+              </a:p>
+            </p:txBody>
+          </p:sp>
+        </mc:Choice>
+        <mc:Fallback xmlns="">
+          <p:sp>
+            <p:nvSpPr>
+              <p:cNvPr id="66" name="ZoneTexte 65"/>
+              <p:cNvSpPr txBox="1">
+                <a:spLocks noRot="1" noChangeAspect="1" noMove="1" noResize="1" noEditPoints="1" noAdjustHandles="1" noChangeArrowheads="1" noChangeShapeType="1" noTextEdit="1"/>
+              </p:cNvSpPr>
+              <p:nvPr/>
+            </p:nvSpPr>
+            <p:spPr>
+              <a:xfrm>
+                <a:off x="2955675" y="2401143"/>
+                <a:ext cx="326371" cy="307777"/>
+              </a:xfrm>
+              <a:prstGeom prst="rect">
+                <a:avLst/>
+              </a:prstGeom>
+              <a:blipFill rotWithShape="1">
+                <a:blip r:embed="rId5"/>
+                <a:stretch>
+                  <a:fillRect/>
+                </a:stretch>
+              </a:blipFill>
+            </p:spPr>
+            <p:txBody>
+              <a:bodyPr/>
+              <a:lstStyle/>
+              <a:p>
+                <a:r>
+                  <a:rPr lang="fr-FR">
+                    <a:noFill/>
+                  </a:rPr>
+                  <a:t> </a:t>
+                </a:r>
+              </a:p>
+            </p:txBody>
+          </p:sp>
+        </mc:Fallback>
+      </mc:AlternateContent>
+      <p:cxnSp>
+        <p:nvCxnSpPr>
+          <p:cNvPr id="69" name="Connecteur droit 68"/>
+          <p:cNvCxnSpPr/>
+          <p:nvPr/>
+        </p:nvCxnSpPr>
+        <p:spPr>
+          <a:xfrm flipH="1">
+            <a:off x="2951820" y="2059256"/>
+            <a:ext cx="11900" cy="720080"/>
+          </a:xfrm>
+          <a:prstGeom prst="line">
+            <a:avLst/>
+          </a:prstGeom>
+          <a:ln w="28575">
+            <a:solidFill>
+              <a:srgbClr val="0070C0"/>
+            </a:solidFill>
+            <a:prstDash val="sysDash"/>
+          </a:ln>
+        </p:spPr>
+        <p:style>
+          <a:lnRef idx="1">
+            <a:schemeClr val="accent1"/>
+          </a:lnRef>
+          <a:fillRef idx="0">
+            <a:schemeClr val="accent1"/>
+          </a:fillRef>
+          <a:effectRef idx="0">
+            <a:schemeClr val="accent1"/>
+          </a:effectRef>
+          <a:fontRef idx="minor">
+            <a:schemeClr val="tx1"/>
+          </a:fontRef>
+        </p:style>
+      </p:cxnSp>
+      <mc:AlternateContent xmlns:mc="http://schemas.openxmlformats.org/markup-compatibility/2006" xmlns:a14="http://schemas.microsoft.com/office/drawing/2010/main">
+        <mc:Choice Requires="a14">
+          <p:sp>
+            <p:nvSpPr>
+              <p:cNvPr id="71" name="ZoneTexte 70"/>
+              <p:cNvSpPr txBox="1"/>
+              <p:nvPr/>
+            </p:nvSpPr>
+            <p:spPr>
+              <a:xfrm>
+                <a:off x="3844805" y="1005378"/>
+                <a:ext cx="344517" cy="307777"/>
+              </a:xfrm>
+              <a:prstGeom prst="rect">
+                <a:avLst/>
+              </a:prstGeom>
+              <a:noFill/>
+            </p:spPr>
+            <p:txBody>
+              <a:bodyPr wrap="none" rtlCol="0">
+                <a:spAutoFit/>
+              </a:bodyPr>
+              <a:lstStyle/>
+              <a:p>
+                <a:pPr/>
+                <a14:m>
+                  <m:oMathPara xmlns:m="http://schemas.openxmlformats.org/officeDocument/2006/math">
+                    <m:oMathParaPr>
+                      <m:jc m:val="centerGroup"/>
+                    </m:oMathParaPr>
+                    <m:oMath xmlns:m="http://schemas.openxmlformats.org/officeDocument/2006/math">
+                      <m:r>
+                        <a:rPr lang="fr-FR" sz="1400" b="0" i="1" smtClean="0">
+                          <a:latin typeface="Cambria Math"/>
+                        </a:rPr>
+                        <m:t>𝑋</m:t>
+                      </m:r>
+                    </m:oMath>
+                  </m:oMathPara>
+                </a14:m>
+                <a:endParaRPr lang="fr-FR" dirty="0"/>
+              </a:p>
+            </p:txBody>
+          </p:sp>
+        </mc:Choice>
+        <mc:Fallback xmlns="">
+          <p:sp>
+            <p:nvSpPr>
+              <p:cNvPr id="71" name="ZoneTexte 70"/>
+              <p:cNvSpPr txBox="1">
+                <a:spLocks noRot="1" noChangeAspect="1" noMove="1" noResize="1" noEditPoints="1" noAdjustHandles="1" noChangeArrowheads="1" noChangeShapeType="1" noTextEdit="1"/>
+              </p:cNvSpPr>
+              <p:nvPr/>
+            </p:nvSpPr>
+            <p:spPr>
+              <a:xfrm>
+                <a:off x="3844805" y="1005378"/>
+                <a:ext cx="344517" cy="307777"/>
+              </a:xfrm>
+              <a:prstGeom prst="rect">
+                <a:avLst/>
+              </a:prstGeom>
+              <a:blipFill rotWithShape="1">
+                <a:blip r:embed="rId6"/>
+                <a:stretch>
+                  <a:fillRect/>
+                </a:stretch>
+              </a:blipFill>
+            </p:spPr>
+            <p:txBody>
+              <a:bodyPr/>
+              <a:lstStyle/>
+              <a:p>
+                <a:r>
+                  <a:rPr lang="fr-FR">
+                    <a:noFill/>
+                  </a:rPr>
+                  <a:t> </a:t>
+                </a:r>
+              </a:p>
+            </p:txBody>
+          </p:sp>
+        </mc:Fallback>
+      </mc:AlternateContent>
+      <mc:AlternateContent xmlns:mc="http://schemas.openxmlformats.org/markup-compatibility/2006" xmlns:a14="http://schemas.microsoft.com/office/drawing/2010/main">
+        <mc:Choice Requires="a14">
+          <p:sp>
+            <p:nvSpPr>
+              <p:cNvPr id="72" name="ZoneTexte 71"/>
+              <p:cNvSpPr txBox="1"/>
+              <p:nvPr/>
+            </p:nvSpPr>
+            <p:spPr>
+              <a:xfrm>
+                <a:off x="489481" y="1463448"/>
+                <a:ext cx="482119" cy="307777"/>
+              </a:xfrm>
+              <a:prstGeom prst="rect">
+                <a:avLst/>
+              </a:prstGeom>
+              <a:noFill/>
+            </p:spPr>
+            <p:txBody>
+              <a:bodyPr wrap="none" rtlCol="0">
+                <a:spAutoFit/>
+              </a:bodyPr>
+              <a:lstStyle/>
+              <a:p>
+                <a:pPr/>
+                <a14:m>
+                  <m:oMathPara xmlns:m="http://schemas.openxmlformats.org/officeDocument/2006/math">
+                    <m:oMathParaPr>
+                      <m:jc m:val="centerGroup"/>
+                    </m:oMathParaPr>
+                    <m:oMath xmlns:m="http://schemas.openxmlformats.org/officeDocument/2006/math">
+                      <m:r>
+                        <a:rPr lang="fr-FR" sz="1400" b="0" i="1" smtClean="0">
+                          <a:latin typeface="Cambria Math"/>
+                        </a:rPr>
+                        <m:t>0 </m:t>
+                      </m:r>
+                      <m:r>
+                        <a:rPr lang="fr-FR" sz="1400" b="0" i="1" smtClean="0">
+                          <a:latin typeface="Cambria Math"/>
+                        </a:rPr>
+                        <m:t>𝑉</m:t>
+                      </m:r>
+                    </m:oMath>
+                  </m:oMathPara>
+                </a14:m>
+                <a:endParaRPr lang="fr-FR" dirty="0"/>
+              </a:p>
+            </p:txBody>
+          </p:sp>
+        </mc:Choice>
+        <mc:Fallback xmlns="">
+          <p:sp>
+            <p:nvSpPr>
+              <p:cNvPr id="72" name="ZoneTexte 71"/>
+              <p:cNvSpPr txBox="1">
+                <a:spLocks noRot="1" noChangeAspect="1" noMove="1" noResize="1" noEditPoints="1" noAdjustHandles="1" noChangeArrowheads="1" noChangeShapeType="1" noTextEdit="1"/>
+              </p:cNvSpPr>
+              <p:nvPr/>
+            </p:nvSpPr>
+            <p:spPr>
+              <a:xfrm>
+                <a:off x="489481" y="1463448"/>
+                <a:ext cx="482119" cy="307777"/>
+              </a:xfrm>
+              <a:prstGeom prst="rect">
+                <a:avLst/>
+              </a:prstGeom>
+              <a:blipFill rotWithShape="1">
+                <a:blip r:embed="rId7"/>
+                <a:stretch>
+                  <a:fillRect/>
+                </a:stretch>
+              </a:blipFill>
+            </p:spPr>
+            <p:txBody>
+              <a:bodyPr/>
+              <a:lstStyle/>
+              <a:p>
+                <a:r>
+                  <a:rPr lang="fr-FR">
+                    <a:noFill/>
+                  </a:rPr>
+                  <a:t> </a:t>
+                </a:r>
+              </a:p>
+            </p:txBody>
+          </p:sp>
+        </mc:Fallback>
+      </mc:AlternateContent>
+      <mc:AlternateContent xmlns:mc="http://schemas.openxmlformats.org/markup-compatibility/2006" xmlns:a14="http://schemas.microsoft.com/office/drawing/2010/main">
+        <mc:Choice Requires="a14">
+          <p:sp>
+            <p:nvSpPr>
+              <p:cNvPr id="73" name="ZoneTexte 72"/>
+              <p:cNvSpPr txBox="1"/>
+              <p:nvPr/>
+            </p:nvSpPr>
+            <p:spPr>
+              <a:xfrm>
+                <a:off x="489480" y="2555031"/>
+                <a:ext cx="482119" cy="307777"/>
+              </a:xfrm>
+              <a:prstGeom prst="rect">
+                <a:avLst/>
+              </a:prstGeom>
+              <a:noFill/>
+            </p:spPr>
+            <p:txBody>
+              <a:bodyPr wrap="none" rtlCol="0">
+                <a:spAutoFit/>
+              </a:bodyPr>
+              <a:lstStyle/>
+              <a:p>
+                <a:pPr/>
+                <a14:m>
+                  <m:oMathPara xmlns:m="http://schemas.openxmlformats.org/officeDocument/2006/math">
+                    <m:oMathParaPr>
+                      <m:jc m:val="centerGroup"/>
+                    </m:oMathParaPr>
+                    <m:oMath xmlns:m="http://schemas.openxmlformats.org/officeDocument/2006/math">
+                      <m:r>
+                        <a:rPr lang="fr-FR" sz="1400" b="0" i="1" smtClean="0">
+                          <a:latin typeface="Cambria Math"/>
+                        </a:rPr>
+                        <m:t>0 </m:t>
+                      </m:r>
+                      <m:r>
+                        <a:rPr lang="fr-FR" sz="1400" b="0" i="1" smtClean="0">
+                          <a:latin typeface="Cambria Math"/>
+                        </a:rPr>
+                        <m:t>𝑉</m:t>
+                      </m:r>
+                    </m:oMath>
+                  </m:oMathPara>
+                </a14:m>
+                <a:endParaRPr lang="fr-FR" dirty="0"/>
+              </a:p>
+            </p:txBody>
+          </p:sp>
+        </mc:Choice>
+        <mc:Fallback xmlns="">
+          <p:sp>
+            <p:nvSpPr>
+              <p:cNvPr id="73" name="ZoneTexte 72"/>
+              <p:cNvSpPr txBox="1">
+                <a:spLocks noRot="1" noChangeAspect="1" noMove="1" noResize="1" noEditPoints="1" noAdjustHandles="1" noChangeArrowheads="1" noChangeShapeType="1" noTextEdit="1"/>
+              </p:cNvSpPr>
+              <p:nvPr/>
+            </p:nvSpPr>
+            <p:spPr>
+              <a:xfrm>
+                <a:off x="489480" y="2555031"/>
+                <a:ext cx="482119" cy="307777"/>
+              </a:xfrm>
+              <a:prstGeom prst="rect">
+                <a:avLst/>
+              </a:prstGeom>
+              <a:blipFill rotWithShape="1">
+                <a:blip r:embed="rId7"/>
+                <a:stretch>
+                  <a:fillRect/>
+                </a:stretch>
+              </a:blipFill>
+            </p:spPr>
+            <p:txBody>
+              <a:bodyPr/>
+              <a:lstStyle/>
+              <a:p>
+                <a:r>
+                  <a:rPr lang="fr-FR">
+                    <a:noFill/>
+                  </a:rPr>
+                  <a:t> </a:t>
+                </a:r>
+              </a:p>
+            </p:txBody>
+          </p:sp>
+        </mc:Fallback>
+      </mc:AlternateContent>
+      <mc:AlternateContent xmlns:mc="http://schemas.openxmlformats.org/markup-compatibility/2006" xmlns:a14="http://schemas.microsoft.com/office/drawing/2010/main">
+        <mc:Choice Requires="a14">
+          <p:sp>
+            <p:nvSpPr>
+              <p:cNvPr id="74" name="ZoneTexte 73"/>
+              <p:cNvSpPr txBox="1"/>
+              <p:nvPr/>
+            </p:nvSpPr>
+            <p:spPr>
+              <a:xfrm>
+                <a:off x="4556927" y="1442650"/>
+                <a:ext cx="581506" cy="307777"/>
+              </a:xfrm>
+              <a:prstGeom prst="rect">
+                <a:avLst/>
+              </a:prstGeom>
+              <a:noFill/>
+            </p:spPr>
+            <p:txBody>
+              <a:bodyPr wrap="none" rtlCol="0">
+                <a:spAutoFit/>
+              </a:bodyPr>
+              <a:lstStyle/>
+              <a:p>
+                <a:pPr/>
+                <a14:m>
+                  <m:oMathPara xmlns:m="http://schemas.openxmlformats.org/officeDocument/2006/math">
+                    <m:oMathParaPr>
+                      <m:jc m:val="centerGroup"/>
+                    </m:oMathParaPr>
+                    <m:oMath xmlns:m="http://schemas.openxmlformats.org/officeDocument/2006/math">
+                      <m:r>
+                        <a:rPr lang="fr-FR" sz="1400" b="0" i="1" smtClean="0">
+                          <a:latin typeface="Cambria Math"/>
+                        </a:rPr>
+                        <m:t>12 </m:t>
+                      </m:r>
+                      <m:r>
+                        <a:rPr lang="fr-FR" sz="1400" b="0" i="1" smtClean="0">
+                          <a:latin typeface="Cambria Math"/>
+                        </a:rPr>
+                        <m:t>𝑉</m:t>
+                      </m:r>
+                    </m:oMath>
+                  </m:oMathPara>
+                </a14:m>
+                <a:endParaRPr lang="fr-FR" dirty="0"/>
+              </a:p>
+            </p:txBody>
+          </p:sp>
+        </mc:Choice>
+        <mc:Fallback xmlns="">
+          <p:sp>
+            <p:nvSpPr>
+              <p:cNvPr id="74" name="ZoneTexte 73"/>
+              <p:cNvSpPr txBox="1">
+                <a:spLocks noRot="1" noChangeAspect="1" noMove="1" noResize="1" noEditPoints="1" noAdjustHandles="1" noChangeArrowheads="1" noChangeShapeType="1" noTextEdit="1"/>
+              </p:cNvSpPr>
+              <p:nvPr/>
+            </p:nvSpPr>
+            <p:spPr>
+              <a:xfrm>
+                <a:off x="4556927" y="1442650"/>
+                <a:ext cx="581506" cy="307777"/>
+              </a:xfrm>
+              <a:prstGeom prst="rect">
+                <a:avLst/>
+              </a:prstGeom>
+              <a:blipFill rotWithShape="1">
+                <a:blip r:embed="rId8"/>
+                <a:stretch>
+                  <a:fillRect/>
+                </a:stretch>
+              </a:blipFill>
+            </p:spPr>
+            <p:txBody>
+              <a:bodyPr/>
+              <a:lstStyle/>
+              <a:p>
+                <a:r>
+                  <a:rPr lang="fr-FR">
+                    <a:noFill/>
+                  </a:rPr>
+                  <a:t> </a:t>
+                </a:r>
+              </a:p>
+            </p:txBody>
+          </p:sp>
+        </mc:Fallback>
+      </mc:AlternateContent>
+      <mc:AlternateContent xmlns:mc="http://schemas.openxmlformats.org/markup-compatibility/2006" xmlns:a14="http://schemas.microsoft.com/office/drawing/2010/main">
+        <mc:Choice Requires="a14">
+          <p:sp>
+            <p:nvSpPr>
+              <p:cNvPr id="75" name="ZoneTexte 74"/>
+              <p:cNvSpPr txBox="1"/>
+              <p:nvPr/>
+            </p:nvSpPr>
+            <p:spPr>
+              <a:xfrm>
+                <a:off x="4561174" y="2543567"/>
+                <a:ext cx="680892" cy="307777"/>
+              </a:xfrm>
+              <a:prstGeom prst="rect">
+                <a:avLst/>
+              </a:prstGeom>
+              <a:noFill/>
+            </p:spPr>
+            <p:txBody>
+              <a:bodyPr wrap="none" rtlCol="0">
+                <a:spAutoFit/>
+              </a:bodyPr>
+              <a:lstStyle/>
+              <a:p>
+                <a:pPr/>
+                <a14:m>
+                  <m:oMathPara xmlns:m="http://schemas.openxmlformats.org/officeDocument/2006/math">
+                    <m:oMathParaPr>
+                      <m:jc m:val="centerGroup"/>
+                    </m:oMathParaPr>
+                    <m:oMath xmlns:m="http://schemas.openxmlformats.org/officeDocument/2006/math">
+                      <m:r>
+                        <a:rPr lang="fr-FR" sz="1400" i="1" smtClean="0">
+                          <a:latin typeface="Cambria Math"/>
+                        </a:rPr>
+                        <m:t>2</m:t>
+                      </m:r>
+                      <m:r>
+                        <a:rPr lang="fr-FR" sz="1400" b="0" i="1" smtClean="0">
+                          <a:latin typeface="Cambria Math"/>
+                        </a:rPr>
+                        <m:t>30 </m:t>
+                      </m:r>
+                      <m:r>
+                        <a:rPr lang="fr-FR" sz="1400" b="0" i="1" smtClean="0">
+                          <a:latin typeface="Cambria Math"/>
+                        </a:rPr>
+                        <m:t>𝑉</m:t>
+                      </m:r>
+                    </m:oMath>
+                  </m:oMathPara>
+                </a14:m>
+                <a:endParaRPr lang="fr-FR" dirty="0"/>
+              </a:p>
+            </p:txBody>
+          </p:sp>
+        </mc:Choice>
+        <mc:Fallback xmlns="">
+          <p:sp>
+            <p:nvSpPr>
+              <p:cNvPr id="75" name="ZoneTexte 74"/>
+              <p:cNvSpPr txBox="1">
+                <a:spLocks noRot="1" noChangeAspect="1" noMove="1" noResize="1" noEditPoints="1" noAdjustHandles="1" noChangeArrowheads="1" noChangeShapeType="1" noTextEdit="1"/>
+              </p:cNvSpPr>
+              <p:nvPr/>
+            </p:nvSpPr>
+            <p:spPr>
+              <a:xfrm>
+                <a:off x="4561174" y="2543567"/>
+                <a:ext cx="680892" cy="307777"/>
+              </a:xfrm>
+              <a:prstGeom prst="rect">
+                <a:avLst/>
+              </a:prstGeom>
+              <a:blipFill rotWithShape="1">
+                <a:blip r:embed="rId9"/>
+                <a:stretch>
+                  <a:fillRect/>
+                </a:stretch>
+              </a:blipFill>
+            </p:spPr>
+            <p:txBody>
+              <a:bodyPr/>
+              <a:lstStyle/>
+              <a:p>
+                <a:r>
+                  <a:rPr lang="fr-FR">
+                    <a:noFill/>
+                  </a:rPr>
+                  <a:t> </a:t>
+                </a:r>
+              </a:p>
+            </p:txBody>
+          </p:sp>
+        </mc:Fallback>
+      </mc:AlternateContent>
+      <p:sp>
+        <p:nvSpPr>
+          <p:cNvPr id="77" name="Ellipse 76"/>
+          <p:cNvSpPr/>
+          <p:nvPr/>
+        </p:nvSpPr>
+        <p:spPr>
+          <a:xfrm>
+            <a:off x="3844383" y="2564904"/>
+            <a:ext cx="288032" cy="288032"/>
+          </a:xfrm>
+          <a:prstGeom prst="ellipse">
+            <a:avLst/>
+          </a:prstGeom>
+          <a:ln w="28575">
+            <a:solidFill>
+              <a:srgbClr val="0070C0"/>
+            </a:solidFill>
+          </a:ln>
+        </p:spPr>
+        <p:style>
+          <a:lnRef idx="1">
+            <a:schemeClr val="accent1"/>
+          </a:lnRef>
+          <a:fillRef idx="0">
+            <a:schemeClr val="accent1"/>
+          </a:fillRef>
+          <a:effectRef idx="0">
+            <a:schemeClr val="accent1"/>
+          </a:effectRef>
+          <a:fontRef idx="minor">
+            <a:schemeClr val="tx1"/>
+          </a:fontRef>
+        </p:style>
+        <p:txBody>
+          <a:bodyPr rtlCol="0" anchor="ctr"/>
+          <a:lstStyle/>
+          <a:p>
+            <a:pPr algn="ctr"/>
+            <a:r>
+              <a:rPr lang="fr-FR" sz="1200" b="1" i="1" dirty="0">
+                <a:solidFill>
+                  <a:schemeClr val="tx1"/>
+                </a:solidFill>
+              </a:rPr>
+              <a:t>M</a:t>
+            </a:r>
+            <a:endParaRPr lang="fr-FR" b="1" i="1" dirty="0">
+              <a:solidFill>
+                <a:schemeClr val="tx1"/>
+              </a:solidFill>
+            </a:endParaRPr>
+          </a:p>
+        </p:txBody>
+      </p:sp>
+      <p:cxnSp>
+        <p:nvCxnSpPr>
+          <p:cNvPr id="78" name="Connecteur droit 77"/>
+          <p:cNvCxnSpPr>
+            <a:endCxn id="77" idx="6"/>
+          </p:cNvCxnSpPr>
+          <p:nvPr/>
+        </p:nvCxnSpPr>
+        <p:spPr>
+          <a:xfrm flipH="1">
+            <a:off x="4132415" y="2708920"/>
+            <a:ext cx="424512" cy="0"/>
+          </a:xfrm>
+          <a:prstGeom prst="line">
+            <a:avLst/>
+          </a:prstGeom>
+          <a:ln w="28575">
+            <a:solidFill>
+              <a:srgbClr val="0070C0"/>
+            </a:solidFill>
+          </a:ln>
+        </p:spPr>
+        <p:style>
+          <a:lnRef idx="1">
+            <a:schemeClr val="accent1"/>
+          </a:lnRef>
+          <a:fillRef idx="0">
+            <a:schemeClr val="accent1"/>
+          </a:fillRef>
+          <a:effectRef idx="0">
+            <a:schemeClr val="accent1"/>
+          </a:effectRef>
+          <a:fontRef idx="minor">
+            <a:schemeClr val="tx1"/>
+          </a:fontRef>
+        </p:style>
+      </p:cxnSp>
+    </p:spTree>
+    <p:extLst>
+      <p:ext uri="{BB962C8B-B14F-4D97-AF65-F5344CB8AC3E}">
+        <p14:creationId xmlns:p14="http://schemas.microsoft.com/office/powerpoint/2010/main" val="305331807"/>
+      </p:ext>
+    </p:extLst>
+  </p:cSld>
+  <p:clrMapOvr>
+    <a:masterClrMapping/>
+  </p:clrMapOvr>
+</p:sld>
+</file>
+
+<file path=ppt/slides/slide11.xml><?xml version="1.0" encoding="utf-8"?>
 <p:sld xmlns:a="http://schemas.openxmlformats.org/drawingml/2006/main" xmlns:r="http://schemas.openxmlformats.org/officeDocument/2006/relationships" xmlns:p="http://schemas.openxmlformats.org/presentationml/2006/main">
   <p:cSld>
     <p:spTree>
@@ -7445,7 +9424,7 @@
 </p:sld>
 </file>
 
-<file path=ppt/slides/slide11.xml><?xml version="1.0" encoding="utf-8"?>
+<file path=ppt/slides/slide12.xml><?xml version="1.0" encoding="utf-8"?>
 <p:sld xmlns:a="http://schemas.openxmlformats.org/drawingml/2006/main" xmlns:r="http://schemas.openxmlformats.org/officeDocument/2006/relationships" xmlns:p="http://schemas.openxmlformats.org/presentationml/2006/main">
   <p:cSld>
     <p:spTree>
@@ -9518,8 +11497,8 @@
           </a:fontRef>
         </p:style>
       </p:cxnSp>
-      <mc:AlternateContent xmlns:mc="http://schemas.openxmlformats.org/markup-compatibility/2006">
-        <mc:Choice xmlns:a14="http://schemas.microsoft.com/office/drawing/2010/main" Requires="a14">
+      <mc:AlternateContent xmlns:mc="http://schemas.openxmlformats.org/markup-compatibility/2006" xmlns:a14="http://schemas.microsoft.com/office/drawing/2010/main">
+        <mc:Choice Requires="a14">
           <p:sp>
             <p:nvSpPr>
               <p:cNvPr id="26" name="ZoneTexte 25">
@@ -9601,7 +11580,7 @@
             </p:txBody>
           </p:sp>
         </mc:Choice>
-        <mc:Fallback>
+        <mc:Fallback xmlns="">
           <p:sp>
             <p:nvSpPr>
               <p:cNvPr id="26" name="ZoneTexte 25">
@@ -9681,8 +11660,8 @@
           </a:p>
         </p:txBody>
       </p:sp>
-      <mc:AlternateContent xmlns:mc="http://schemas.openxmlformats.org/markup-compatibility/2006">
-        <mc:Choice xmlns:a14="http://schemas.microsoft.com/office/drawing/2010/main" Requires="a14">
+      <mc:AlternateContent xmlns:mc="http://schemas.openxmlformats.org/markup-compatibility/2006" xmlns:a14="http://schemas.microsoft.com/office/drawing/2010/main">
+        <mc:Choice Requires="a14">
           <p:sp>
             <p:nvSpPr>
               <p:cNvPr id="35" name="ZoneTexte 34">
@@ -9880,7 +11859,7 @@
             </p:txBody>
           </p:sp>
         </mc:Choice>
-        <mc:Fallback>
+        <mc:Fallback xmlns="">
           <p:sp>
             <p:nvSpPr>
               <p:cNvPr id="35" name="ZoneTexte 34">
@@ -9925,8 +11904,8 @@
           </p:sp>
         </mc:Fallback>
       </mc:AlternateContent>
-      <mc:AlternateContent xmlns:mc="http://schemas.openxmlformats.org/markup-compatibility/2006">
-        <mc:Choice xmlns:a14="http://schemas.microsoft.com/office/drawing/2010/main" Requires="a14">
+      <mc:AlternateContent xmlns:mc="http://schemas.openxmlformats.org/markup-compatibility/2006" xmlns:a14="http://schemas.microsoft.com/office/drawing/2010/main">
+        <mc:Choice Requires="a14">
           <p:sp>
             <p:nvSpPr>
               <p:cNvPr id="36" name="ZoneTexte 35">
@@ -10124,7 +12103,7 @@
             </p:txBody>
           </p:sp>
         </mc:Choice>
-        <mc:Fallback>
+        <mc:Fallback xmlns="">
           <p:sp>
             <p:nvSpPr>
               <p:cNvPr id="36" name="ZoneTexte 35">
@@ -10169,8 +12148,8 @@
           </p:sp>
         </mc:Fallback>
       </mc:AlternateContent>
-      <mc:AlternateContent xmlns:mc="http://schemas.openxmlformats.org/markup-compatibility/2006">
-        <mc:Choice xmlns:a14="http://schemas.microsoft.com/office/drawing/2010/main" Requires="a14">
+      <mc:AlternateContent xmlns:mc="http://schemas.openxmlformats.org/markup-compatibility/2006" xmlns:a14="http://schemas.microsoft.com/office/drawing/2010/main">
+        <mc:Choice Requires="a14">
           <p:sp>
             <p:nvSpPr>
               <p:cNvPr id="37" name="ZoneTexte 36">
@@ -10199,6 +12178,7 @@
               </a:bodyPr>
               <a:lstStyle/>
               <a:p>
+                <a:pPr/>
                 <a14:m>
                   <m:oMathPara xmlns:m="http://schemas.openxmlformats.org/officeDocument/2006/math">
                     <m:oMathParaPr>
@@ -10251,7 +12231,7 @@
             </p:txBody>
           </p:sp>
         </mc:Choice>
-        <mc:Fallback>
+        <mc:Fallback xmlns="">
           <p:sp>
             <p:nvSpPr>
               <p:cNvPr id="37" name="ZoneTexte 36">
@@ -10296,8 +12276,8 @@
           </p:sp>
         </mc:Fallback>
       </mc:AlternateContent>
-      <mc:AlternateContent xmlns:mc="http://schemas.openxmlformats.org/markup-compatibility/2006">
-        <mc:Choice xmlns:a14="http://schemas.microsoft.com/office/drawing/2010/main" Requires="a14">
+      <mc:AlternateContent xmlns:mc="http://schemas.openxmlformats.org/markup-compatibility/2006" xmlns:a14="http://schemas.microsoft.com/office/drawing/2010/main">
+        <mc:Choice Requires="a14">
           <p:sp>
             <p:nvSpPr>
               <p:cNvPr id="39" name="ZoneTexte 38">
@@ -10326,6 +12306,7 @@
               </a:bodyPr>
               <a:lstStyle/>
               <a:p>
+                <a:pPr/>
                 <a14:m>
                   <m:oMathPara xmlns:m="http://schemas.openxmlformats.org/officeDocument/2006/math">
                     <m:oMathParaPr>
@@ -10378,7 +12359,7 @@
             </p:txBody>
           </p:sp>
         </mc:Choice>
-        <mc:Fallback>
+        <mc:Fallback xmlns="">
           <p:sp>
             <p:nvSpPr>
               <p:cNvPr id="39" name="ZoneTexte 38">
@@ -10423,8 +12404,8 @@
           </p:sp>
         </mc:Fallback>
       </mc:AlternateContent>
-      <mc:AlternateContent xmlns:mc="http://schemas.openxmlformats.org/markup-compatibility/2006">
-        <mc:Choice xmlns:a14="http://schemas.microsoft.com/office/drawing/2010/main" Requires="a14">
+      <mc:AlternateContent xmlns:mc="http://schemas.openxmlformats.org/markup-compatibility/2006" xmlns:a14="http://schemas.microsoft.com/office/drawing/2010/main">
+        <mc:Choice Requires="a14">
           <p:sp>
             <p:nvSpPr>
               <p:cNvPr id="40" name="ZoneTexte 39">
@@ -10506,7 +12487,7 @@
             </p:txBody>
           </p:sp>
         </mc:Choice>
-        <mc:Fallback>
+        <mc:Fallback xmlns="">
           <p:sp>
             <p:nvSpPr>
               <p:cNvPr id="40" name="ZoneTexte 39">
@@ -10605,8 +12586,8 @@
           </a:p>
         </p:txBody>
       </p:sp>
-      <mc:AlternateContent xmlns:mc="http://schemas.openxmlformats.org/markup-compatibility/2006">
-        <mc:Choice xmlns:a14="http://schemas.microsoft.com/office/drawing/2010/main" Requires="a14">
+      <mc:AlternateContent xmlns:mc="http://schemas.openxmlformats.org/markup-compatibility/2006" xmlns:a14="http://schemas.microsoft.com/office/drawing/2010/main">
+        <mc:Choice Requires="a14">
           <p:sp>
             <p:nvSpPr>
               <p:cNvPr id="42" name="ZoneTexte 41">
@@ -10635,6 +12616,7 @@
               </a:bodyPr>
               <a:lstStyle/>
               <a:p>
+                <a:pPr/>
                 <a14:m>
                   <m:oMathPara xmlns:m="http://schemas.openxmlformats.org/officeDocument/2006/math">
                     <m:oMathParaPr>
@@ -10687,7 +12669,7 @@
             </p:txBody>
           </p:sp>
         </mc:Choice>
-        <mc:Fallback>
+        <mc:Fallback xmlns="">
           <p:sp>
             <p:nvSpPr>
               <p:cNvPr id="42" name="ZoneTexte 41">
@@ -10786,8 +12768,8 @@
           </a:p>
         </p:txBody>
       </p:sp>
-      <mc:AlternateContent xmlns:mc="http://schemas.openxmlformats.org/markup-compatibility/2006">
-        <mc:Choice xmlns:a14="http://schemas.microsoft.com/office/drawing/2010/main" Requires="a14">
+      <mc:AlternateContent xmlns:mc="http://schemas.openxmlformats.org/markup-compatibility/2006" xmlns:a14="http://schemas.microsoft.com/office/drawing/2010/main">
+        <mc:Choice Requires="a14">
           <p:sp>
             <p:nvSpPr>
               <p:cNvPr id="44" name="ZoneTexte 43">
@@ -10869,7 +12851,7 @@
             </p:txBody>
           </p:sp>
         </mc:Choice>
-        <mc:Fallback>
+        <mc:Fallback xmlns="">
           <p:sp>
             <p:nvSpPr>
               <p:cNvPr id="44" name="ZoneTexte 43">
@@ -10928,6 +12910,420 @@
 </file>
 
 <file path=ppt/slides/slide3.xml><?xml version="1.0" encoding="utf-8"?>
+<p:sld xmlns:a="http://schemas.openxmlformats.org/drawingml/2006/main" xmlns:r="http://schemas.openxmlformats.org/officeDocument/2006/relationships" xmlns:p="http://schemas.openxmlformats.org/presentationml/2006/main">
+  <p:cSld>
+    <p:spTree>
+      <p:nvGrpSpPr>
+        <p:cNvPr id="1" name=""/>
+        <p:cNvGrpSpPr/>
+        <p:nvPr/>
+      </p:nvGrpSpPr>
+      <p:grpSpPr>
+        <a:xfrm>
+          <a:off x="0" y="0"/>
+          <a:ext cx="0" cy="0"/>
+          <a:chOff x="0" y="0"/>
+          <a:chExt cx="0" cy="0"/>
+        </a:xfrm>
+      </p:grpSpPr>
+      <p:sp>
+        <p:nvSpPr>
+          <p:cNvPr id="6" name="Rectangle : coins arrondis 5">
+            <a:extLst>
+              <a:ext uri="{FF2B5EF4-FFF2-40B4-BE49-F238E27FC236}">
+                <a16:creationId xmlns:a16="http://schemas.microsoft.com/office/drawing/2014/main" id="{61F825A9-41E8-FBA6-736E-C8843C8A8E46}"/>
+              </a:ext>
+            </a:extLst>
+          </p:cNvPr>
+          <p:cNvSpPr/>
+          <p:nvPr/>
+        </p:nvSpPr>
+        <p:spPr>
+          <a:xfrm>
+            <a:off x="1691680" y="1268760"/>
+            <a:ext cx="1440160" cy="720080"/>
+          </a:xfrm>
+          <a:prstGeom prst="roundRect">
+            <a:avLst>
+              <a:gd name="adj" fmla="val 16667"/>
+            </a:avLst>
+          </a:prstGeom>
+          <a:solidFill>
+            <a:schemeClr val="accent1">
+              <a:lumMod val="20000"/>
+              <a:lumOff val="80000"/>
+            </a:schemeClr>
+          </a:solidFill>
+          <a:ln w="19050">
+            <a:solidFill>
+              <a:srgbClr val="002060"/>
+            </a:solidFill>
+          </a:ln>
+        </p:spPr>
+        <p:style>
+          <a:lnRef idx="2">
+            <a:schemeClr val="accent1">
+              <a:shade val="15000"/>
+            </a:schemeClr>
+          </a:lnRef>
+          <a:fillRef idx="1">
+            <a:schemeClr val="accent1"/>
+          </a:fillRef>
+          <a:effectRef idx="0">
+            <a:schemeClr val="accent1"/>
+          </a:effectRef>
+          <a:fontRef idx="minor">
+            <a:schemeClr val="lt1"/>
+          </a:fontRef>
+        </p:style>
+        <p:txBody>
+          <a:bodyPr rtlCol="0" anchor="ctr"/>
+          <a:lstStyle/>
+          <a:p>
+            <a:pPr algn="ctr"/>
+            <a:r>
+              <a:rPr lang="fr-FR" sz="1200" b="1" dirty="0">
+                <a:solidFill>
+                  <a:schemeClr val="tx1"/>
+                </a:solidFill>
+              </a:rPr>
+              <a:t>Etat</a:t>
+            </a:r>
+            <a:endParaRPr lang="fr-FR" sz="1000" b="1" dirty="0">
+              <a:solidFill>
+                <a:schemeClr val="tx1"/>
+              </a:solidFill>
+            </a:endParaRPr>
+          </a:p>
+          <a:p>
+            <a:r>
+              <a:rPr lang="fr-FR" sz="1000" dirty="0">
+                <a:solidFill>
+                  <a:schemeClr val="tx1"/>
+                </a:solidFill>
+              </a:rPr>
+              <a:t>entry/</a:t>
+            </a:r>
+          </a:p>
+          <a:p>
+            <a:r>
+              <a:rPr lang="fr-FR" sz="1000" dirty="0">
+                <a:solidFill>
+                  <a:schemeClr val="tx1"/>
+                </a:solidFill>
+              </a:rPr>
+              <a:t>do/</a:t>
+            </a:r>
+          </a:p>
+          <a:p>
+            <a:r>
+              <a:rPr lang="fr-FR" sz="1000" dirty="0">
+                <a:solidFill>
+                  <a:schemeClr val="tx1"/>
+                </a:solidFill>
+              </a:rPr>
+              <a:t>exit /</a:t>
+            </a:r>
+          </a:p>
+        </p:txBody>
+      </p:sp>
+      <p:cxnSp>
+        <p:nvCxnSpPr>
+          <p:cNvPr id="7" name="Connecteur droit 6">
+            <a:extLst>
+              <a:ext uri="{FF2B5EF4-FFF2-40B4-BE49-F238E27FC236}">
+                <a16:creationId xmlns:a16="http://schemas.microsoft.com/office/drawing/2014/main" id="{08EB32EA-5C81-C72C-2AB1-745786079755}"/>
+              </a:ext>
+            </a:extLst>
+          </p:cNvPr>
+          <p:cNvCxnSpPr>
+            <a:cxnSpLocks/>
+          </p:cNvCxnSpPr>
+          <p:nvPr/>
+        </p:nvCxnSpPr>
+        <p:spPr>
+          <a:xfrm flipH="1">
+            <a:off x="2987824" y="2780928"/>
+            <a:ext cx="2147664" cy="0"/>
+          </a:xfrm>
+          <a:prstGeom prst="line">
+            <a:avLst/>
+          </a:prstGeom>
+          <a:ln w="19050">
+            <a:solidFill>
+              <a:srgbClr val="002060"/>
+            </a:solidFill>
+            <a:headEnd type="stealth" w="sm" len="med"/>
+            <a:tailEnd type="none"/>
+          </a:ln>
+        </p:spPr>
+        <p:style>
+          <a:lnRef idx="1">
+            <a:schemeClr val="accent1"/>
+          </a:lnRef>
+          <a:fillRef idx="0">
+            <a:schemeClr val="accent1"/>
+          </a:fillRef>
+          <a:effectRef idx="0">
+            <a:schemeClr val="accent1"/>
+          </a:effectRef>
+          <a:fontRef idx="minor">
+            <a:schemeClr val="tx1"/>
+          </a:fontRef>
+        </p:style>
+      </p:cxnSp>
+      <p:sp>
+        <p:nvSpPr>
+          <p:cNvPr id="8" name="ZoneTexte 7">
+            <a:extLst>
+              <a:ext uri="{FF2B5EF4-FFF2-40B4-BE49-F238E27FC236}">
+                <a16:creationId xmlns:a16="http://schemas.microsoft.com/office/drawing/2014/main" id="{CD8605BF-671A-8527-CB9A-A5C718BD0FBE}"/>
+              </a:ext>
+            </a:extLst>
+          </p:cNvPr>
+          <p:cNvSpPr txBox="1"/>
+          <p:nvPr/>
+        </p:nvSpPr>
+        <p:spPr>
+          <a:xfrm>
+            <a:off x="3131840" y="2493186"/>
+            <a:ext cx="1880708" cy="215444"/>
+          </a:xfrm>
+          <a:prstGeom prst="rect">
+            <a:avLst/>
+          </a:prstGeom>
+          <a:noFill/>
+        </p:spPr>
+        <p:txBody>
+          <a:bodyPr wrap="none" lIns="0" tIns="0" rIns="0" bIns="0" rtlCol="0">
+            <a:spAutoFit/>
+          </a:bodyPr>
+          <a:lstStyle/>
+          <a:p>
+            <a:pPr/>
+            <a:r>
+              <a:rPr lang="fr-FR" sz="1400" dirty="0"/>
+              <a:t>événement [garde] / effet</a:t>
+            </a:r>
+          </a:p>
+        </p:txBody>
+      </p:sp>
+      <p:sp>
+        <p:nvSpPr>
+          <p:cNvPr id="9" name="Rectangle : coins arrondis 8">
+            <a:extLst>
+              <a:ext uri="{FF2B5EF4-FFF2-40B4-BE49-F238E27FC236}">
+                <a16:creationId xmlns:a16="http://schemas.microsoft.com/office/drawing/2014/main" id="{9D975C9B-AF7D-672F-60B0-A8B6F4EC00A1}"/>
+              </a:ext>
+            </a:extLst>
+          </p:cNvPr>
+          <p:cNvSpPr/>
+          <p:nvPr/>
+        </p:nvSpPr>
+        <p:spPr>
+          <a:xfrm>
+            <a:off x="1547664" y="2420888"/>
+            <a:ext cx="1440160" cy="720080"/>
+          </a:xfrm>
+          <a:prstGeom prst="roundRect">
+            <a:avLst>
+              <a:gd name="adj" fmla="val 16667"/>
+            </a:avLst>
+          </a:prstGeom>
+          <a:solidFill>
+            <a:schemeClr val="accent1">
+              <a:lumMod val="20000"/>
+              <a:lumOff val="80000"/>
+            </a:schemeClr>
+          </a:solidFill>
+          <a:ln w="19050">
+            <a:solidFill>
+              <a:srgbClr val="002060"/>
+            </a:solidFill>
+          </a:ln>
+        </p:spPr>
+        <p:style>
+          <a:lnRef idx="2">
+            <a:schemeClr val="accent1">
+              <a:shade val="15000"/>
+            </a:schemeClr>
+          </a:lnRef>
+          <a:fillRef idx="1">
+            <a:schemeClr val="accent1"/>
+          </a:fillRef>
+          <a:effectRef idx="0">
+            <a:schemeClr val="accent1"/>
+          </a:effectRef>
+          <a:fontRef idx="minor">
+            <a:schemeClr val="lt1"/>
+          </a:fontRef>
+        </p:style>
+        <p:txBody>
+          <a:bodyPr rtlCol="0" anchor="ctr"/>
+          <a:lstStyle/>
+          <a:p>
+            <a:pPr algn="ctr"/>
+            <a:r>
+              <a:rPr lang="fr-FR" sz="1200" b="1" dirty="0">
+                <a:solidFill>
+                  <a:schemeClr val="tx1"/>
+                </a:solidFill>
+              </a:rPr>
+              <a:t>Etat</a:t>
+            </a:r>
+            <a:endParaRPr lang="fr-FR" sz="1000" b="1" dirty="0">
+              <a:solidFill>
+                <a:schemeClr val="tx1"/>
+              </a:solidFill>
+            </a:endParaRPr>
+          </a:p>
+          <a:p>
+            <a:r>
+              <a:rPr lang="fr-FR" sz="1000" dirty="0">
+                <a:solidFill>
+                  <a:schemeClr val="tx1"/>
+                </a:solidFill>
+              </a:rPr>
+              <a:t>entry/</a:t>
+            </a:r>
+          </a:p>
+          <a:p>
+            <a:r>
+              <a:rPr lang="fr-FR" sz="1000" dirty="0">
+                <a:solidFill>
+                  <a:schemeClr val="tx1"/>
+                </a:solidFill>
+              </a:rPr>
+              <a:t>do/</a:t>
+            </a:r>
+          </a:p>
+          <a:p>
+            <a:r>
+              <a:rPr lang="fr-FR" sz="1000" dirty="0">
+                <a:solidFill>
+                  <a:schemeClr val="tx1"/>
+                </a:solidFill>
+              </a:rPr>
+              <a:t>exit /</a:t>
+            </a:r>
+          </a:p>
+        </p:txBody>
+      </p:sp>
+      <p:sp>
+        <p:nvSpPr>
+          <p:cNvPr id="10" name="Rectangle : coins arrondis 9">
+            <a:extLst>
+              <a:ext uri="{FF2B5EF4-FFF2-40B4-BE49-F238E27FC236}">
+                <a16:creationId xmlns:a16="http://schemas.microsoft.com/office/drawing/2014/main" id="{AEB999FB-3171-8A64-D073-8E57264F4269}"/>
+              </a:ext>
+            </a:extLst>
+          </p:cNvPr>
+          <p:cNvSpPr/>
+          <p:nvPr/>
+        </p:nvSpPr>
+        <p:spPr>
+          <a:xfrm>
+            <a:off x="5135488" y="2420888"/>
+            <a:ext cx="1440160" cy="720080"/>
+          </a:xfrm>
+          <a:prstGeom prst="roundRect">
+            <a:avLst>
+              <a:gd name="adj" fmla="val 16667"/>
+            </a:avLst>
+          </a:prstGeom>
+          <a:solidFill>
+            <a:schemeClr val="accent1">
+              <a:lumMod val="20000"/>
+              <a:lumOff val="80000"/>
+            </a:schemeClr>
+          </a:solidFill>
+          <a:ln w="19050">
+            <a:solidFill>
+              <a:srgbClr val="002060"/>
+            </a:solidFill>
+          </a:ln>
+        </p:spPr>
+        <p:style>
+          <a:lnRef idx="2">
+            <a:schemeClr val="accent1">
+              <a:shade val="15000"/>
+            </a:schemeClr>
+          </a:lnRef>
+          <a:fillRef idx="1">
+            <a:schemeClr val="accent1"/>
+          </a:fillRef>
+          <a:effectRef idx="0">
+            <a:schemeClr val="accent1"/>
+          </a:effectRef>
+          <a:fontRef idx="minor">
+            <a:schemeClr val="lt1"/>
+          </a:fontRef>
+        </p:style>
+        <p:txBody>
+          <a:bodyPr rtlCol="0" anchor="ctr"/>
+          <a:lstStyle/>
+          <a:p>
+            <a:pPr algn="ctr"/>
+            <a:r>
+              <a:rPr lang="fr-FR" sz="1200" b="1" dirty="0">
+                <a:solidFill>
+                  <a:schemeClr val="tx1"/>
+                </a:solidFill>
+              </a:rPr>
+              <a:t>Etat</a:t>
+            </a:r>
+            <a:endParaRPr lang="fr-FR" sz="1000" b="1" dirty="0">
+              <a:solidFill>
+                <a:schemeClr val="tx1"/>
+              </a:solidFill>
+            </a:endParaRPr>
+          </a:p>
+          <a:p>
+            <a:r>
+              <a:rPr lang="fr-FR" sz="1000" dirty="0">
+                <a:solidFill>
+                  <a:schemeClr val="tx1"/>
+                </a:solidFill>
+              </a:rPr>
+              <a:t>entry/</a:t>
+            </a:r>
+          </a:p>
+          <a:p>
+            <a:r>
+              <a:rPr lang="fr-FR" sz="1000" dirty="0">
+                <a:solidFill>
+                  <a:schemeClr val="tx1"/>
+                </a:solidFill>
+              </a:rPr>
+              <a:t>do/</a:t>
+            </a:r>
+          </a:p>
+          <a:p>
+            <a:r>
+              <a:rPr lang="fr-FR" sz="1000" dirty="0">
+                <a:solidFill>
+                  <a:schemeClr val="tx1"/>
+                </a:solidFill>
+              </a:rPr>
+              <a:t>exit /</a:t>
+            </a:r>
+          </a:p>
+        </p:txBody>
+      </p:sp>
+    </p:spTree>
+    <p:extLst>
+      <p:ext uri="{BB962C8B-B14F-4D97-AF65-F5344CB8AC3E}">
+        <p14:creationId xmlns:p14="http://schemas.microsoft.com/office/powerpoint/2010/main" val="2999873803"/>
+      </p:ext>
+    </p:extLst>
+  </p:cSld>
+  <p:clrMapOvr>
+    <a:masterClrMapping/>
+  </p:clrMapOvr>
+</p:sld>
+</file>
+
+<file path=ppt/slides/slide4.xml><?xml version="1.0" encoding="utf-8"?>
 <p:sld xmlns:a="http://schemas.openxmlformats.org/drawingml/2006/main" xmlns:r="http://schemas.openxmlformats.org/officeDocument/2006/relationships" xmlns:p="http://schemas.openxmlformats.org/presentationml/2006/main">
   <p:cSld>
     <p:spTree>
@@ -11500,8 +13896,8 @@
             </a:p>
           </p:txBody>
         </p:sp>
-        <mc:AlternateContent xmlns:mc="http://schemas.openxmlformats.org/markup-compatibility/2006">
-          <mc:Choice xmlns:a14="http://schemas.microsoft.com/office/drawing/2010/main" Requires="a14">
+        <mc:AlternateContent xmlns:mc="http://schemas.openxmlformats.org/markup-compatibility/2006" xmlns:a14="http://schemas.microsoft.com/office/drawing/2010/main">
+          <mc:Choice Requires="a14">
             <p:sp>
               <p:nvSpPr>
                 <p:cNvPr id="14" name="ZoneTexte 13">
@@ -11580,7 +13976,7 @@
               </p:txBody>
             </p:sp>
           </mc:Choice>
-          <mc:Fallback>
+          <mc:Fallback xmlns="">
             <p:sp>
               <p:nvSpPr>
                 <p:cNvPr id="14" name="ZoneTexte 13">
@@ -11625,8 +14021,8 @@
             </p:sp>
           </mc:Fallback>
         </mc:AlternateContent>
-        <mc:AlternateContent xmlns:mc="http://schemas.openxmlformats.org/markup-compatibility/2006">
-          <mc:Choice xmlns:a14="http://schemas.microsoft.com/office/drawing/2010/main" Requires="a14">
+        <mc:AlternateContent xmlns:mc="http://schemas.openxmlformats.org/markup-compatibility/2006" xmlns:a14="http://schemas.microsoft.com/office/drawing/2010/main">
+          <mc:Choice Requires="a14">
             <p:sp>
               <p:nvSpPr>
                 <p:cNvPr id="15" name="ZoneTexte 14">
@@ -11655,7 +14051,6 @@
                 </a:bodyPr>
                 <a:lstStyle/>
                 <a:p>
-                  <a:pPr/>
                   <a14:m>
                     <m:oMath xmlns:m="http://schemas.openxmlformats.org/officeDocument/2006/math">
                       <m:d>
@@ -11706,7 +14101,7 @@
               </p:txBody>
             </p:sp>
           </mc:Choice>
-          <mc:Fallback>
+          <mc:Fallback xmlns="">
             <p:sp>
               <p:nvSpPr>
                 <p:cNvPr id="15" name="ZoneTexte 14">
@@ -11859,8 +14254,8 @@
             </a:p>
           </p:txBody>
         </p:sp>
-        <mc:AlternateContent xmlns:mc="http://schemas.openxmlformats.org/markup-compatibility/2006">
-          <mc:Choice xmlns:a14="http://schemas.microsoft.com/office/drawing/2010/main" Requires="a14">
+        <mc:AlternateContent xmlns:mc="http://schemas.openxmlformats.org/markup-compatibility/2006" xmlns:a14="http://schemas.microsoft.com/office/drawing/2010/main">
+          <mc:Choice Requires="a14">
             <p:sp>
               <p:nvSpPr>
                 <p:cNvPr id="18" name="ZoneTexte 17">
@@ -11889,7 +14284,6 @@
                 </a:bodyPr>
                 <a:lstStyle/>
                 <a:p>
-                  <a:pPr/>
                   <a14:m>
                     <m:oMath xmlns:m="http://schemas.openxmlformats.org/officeDocument/2006/math">
                       <m:d>
@@ -11940,7 +14334,7 @@
               </p:txBody>
             </p:sp>
           </mc:Choice>
-          <mc:Fallback>
+          <mc:Fallback xmlns="">
             <p:sp>
               <p:nvSpPr>
                 <p:cNvPr id="18" name="ZoneTexte 17">
@@ -11985,8 +14379,8 @@
             </p:sp>
           </mc:Fallback>
         </mc:AlternateContent>
-        <mc:AlternateContent xmlns:mc="http://schemas.openxmlformats.org/markup-compatibility/2006">
-          <mc:Choice xmlns:a14="http://schemas.microsoft.com/office/drawing/2010/main" Requires="a14">
+        <mc:AlternateContent xmlns:mc="http://schemas.openxmlformats.org/markup-compatibility/2006" xmlns:a14="http://schemas.microsoft.com/office/drawing/2010/main">
+          <mc:Choice Requires="a14">
             <p:sp>
               <p:nvSpPr>
                 <p:cNvPr id="19" name="ZoneTexte 18">
@@ -12065,7 +14459,7 @@
               </p:txBody>
             </p:sp>
           </mc:Choice>
-          <mc:Fallback>
+          <mc:Fallback xmlns="">
             <p:sp>
               <p:nvSpPr>
                 <p:cNvPr id="19" name="ZoneTexte 18">
@@ -12110,8 +14504,8 @@
             </p:sp>
           </mc:Fallback>
         </mc:AlternateContent>
-        <mc:AlternateContent xmlns:mc="http://schemas.openxmlformats.org/markup-compatibility/2006">
-          <mc:Choice xmlns:a14="http://schemas.microsoft.com/office/drawing/2010/main" Requires="a14">
+        <mc:AlternateContent xmlns:mc="http://schemas.openxmlformats.org/markup-compatibility/2006" xmlns:a14="http://schemas.microsoft.com/office/drawing/2010/main">
+          <mc:Choice Requires="a14">
             <p:sp>
               <p:nvSpPr>
                 <p:cNvPr id="20" name="ZoneTexte 19">
@@ -12190,7 +14584,7 @@
               </p:txBody>
             </p:sp>
           </mc:Choice>
-          <mc:Fallback>
+          <mc:Fallback xmlns="">
             <p:sp>
               <p:nvSpPr>
                 <p:cNvPr id="20" name="ZoneTexte 19">
@@ -12235,8 +14629,8 @@
             </p:sp>
           </mc:Fallback>
         </mc:AlternateContent>
-        <mc:AlternateContent xmlns:mc="http://schemas.openxmlformats.org/markup-compatibility/2006">
-          <mc:Choice xmlns:a14="http://schemas.microsoft.com/office/drawing/2010/main" Requires="a14">
+        <mc:AlternateContent xmlns:mc="http://schemas.openxmlformats.org/markup-compatibility/2006" xmlns:a14="http://schemas.microsoft.com/office/drawing/2010/main">
+          <mc:Choice Requires="a14">
             <p:sp>
               <p:nvSpPr>
                 <p:cNvPr id="21" name="ZoneTexte 20">
@@ -12265,7 +14659,6 @@
                 </a:bodyPr>
                 <a:lstStyle/>
                 <a:p>
-                  <a:pPr/>
                   <a14:m>
                     <m:oMath xmlns:m="http://schemas.openxmlformats.org/officeDocument/2006/math">
                       <m:d>
@@ -12316,7 +14709,7 @@
               </p:txBody>
             </p:sp>
           </mc:Choice>
-          <mc:Fallback>
+          <mc:Fallback xmlns="">
             <p:sp>
               <p:nvSpPr>
                 <p:cNvPr id="21" name="ZoneTexte 20">
@@ -12937,8 +15330,8 @@
             </a:fontRef>
           </p:style>
         </p:cxnSp>
-        <mc:AlternateContent xmlns:mc="http://schemas.openxmlformats.org/markup-compatibility/2006">
-          <mc:Choice xmlns:a14="http://schemas.microsoft.com/office/drawing/2010/main" Requires="a14">
+        <mc:AlternateContent xmlns:mc="http://schemas.openxmlformats.org/markup-compatibility/2006" xmlns:a14="http://schemas.microsoft.com/office/drawing/2010/main">
+          <mc:Choice Requires="a14">
             <p:sp>
               <p:nvSpPr>
                 <p:cNvPr id="32" name="ZoneTexte 31">
@@ -13020,7 +15413,7 @@
               </p:txBody>
             </p:sp>
           </mc:Choice>
-          <mc:Fallback>
+          <mc:Fallback xmlns="">
             <p:sp>
               <p:nvSpPr>
                 <p:cNvPr id="32" name="ZoneTexte 31">
@@ -13100,8 +15493,8 @@
             </a:p>
           </p:txBody>
         </p:sp>
-        <mc:AlternateContent xmlns:mc="http://schemas.openxmlformats.org/markup-compatibility/2006">
-          <mc:Choice xmlns:a14="http://schemas.microsoft.com/office/drawing/2010/main" Requires="a14">
+        <mc:AlternateContent xmlns:mc="http://schemas.openxmlformats.org/markup-compatibility/2006" xmlns:a14="http://schemas.microsoft.com/office/drawing/2010/main">
+          <mc:Choice Requires="a14">
             <p:sp>
               <p:nvSpPr>
                 <p:cNvPr id="34" name="ZoneTexte 33">
@@ -13130,6 +15523,7 @@
                 </a:bodyPr>
                 <a:lstStyle/>
                 <a:p>
+                  <a:pPr/>
                   <a14:m>
                     <m:oMathPara xmlns:m="http://schemas.openxmlformats.org/officeDocument/2006/math">
                       <m:oMathParaPr>
@@ -13182,7 +15576,7 @@
               </p:txBody>
             </p:sp>
           </mc:Choice>
-          <mc:Fallback>
+          <mc:Fallback xmlns="">
             <p:sp>
               <p:nvSpPr>
                 <p:cNvPr id="34" name="ZoneTexte 33">
@@ -13227,8 +15621,8 @@
             </p:sp>
           </mc:Fallback>
         </mc:AlternateContent>
-        <mc:AlternateContent xmlns:mc="http://schemas.openxmlformats.org/markup-compatibility/2006">
-          <mc:Choice xmlns:a14="http://schemas.microsoft.com/office/drawing/2010/main" Requires="a14">
+        <mc:AlternateContent xmlns:mc="http://schemas.openxmlformats.org/markup-compatibility/2006" xmlns:a14="http://schemas.microsoft.com/office/drawing/2010/main">
+          <mc:Choice Requires="a14">
             <p:sp>
               <p:nvSpPr>
                 <p:cNvPr id="35" name="ZoneTexte 34">
@@ -13257,6 +15651,7 @@
                 </a:bodyPr>
                 <a:lstStyle/>
                 <a:p>
+                  <a:pPr/>
                   <a14:m>
                     <m:oMathPara xmlns:m="http://schemas.openxmlformats.org/officeDocument/2006/math">
                       <m:oMathParaPr>
@@ -13309,7 +15704,7 @@
               </p:txBody>
             </p:sp>
           </mc:Choice>
-          <mc:Fallback>
+          <mc:Fallback xmlns="">
             <p:sp>
               <p:nvSpPr>
                 <p:cNvPr id="35" name="ZoneTexte 34">
@@ -13354,8 +15749,8 @@
             </p:sp>
           </mc:Fallback>
         </mc:AlternateContent>
-        <mc:AlternateContent xmlns:mc="http://schemas.openxmlformats.org/markup-compatibility/2006">
-          <mc:Choice xmlns:a14="http://schemas.microsoft.com/office/drawing/2010/main" Requires="a14">
+        <mc:AlternateContent xmlns:mc="http://schemas.openxmlformats.org/markup-compatibility/2006" xmlns:a14="http://schemas.microsoft.com/office/drawing/2010/main">
+          <mc:Choice Requires="a14">
             <p:sp>
               <p:nvSpPr>
                 <p:cNvPr id="36" name="ZoneTexte 35">
@@ -13437,7 +15832,7 @@
               </p:txBody>
             </p:sp>
           </mc:Choice>
-          <mc:Fallback>
+          <mc:Fallback xmlns="">
             <p:sp>
               <p:nvSpPr>
                 <p:cNvPr id="36" name="ZoneTexte 35">
@@ -13536,8 +15931,8 @@
             </a:p>
           </p:txBody>
         </p:sp>
-        <mc:AlternateContent xmlns:mc="http://schemas.openxmlformats.org/markup-compatibility/2006">
-          <mc:Choice xmlns:a14="http://schemas.microsoft.com/office/drawing/2010/main" Requires="a14">
+        <mc:AlternateContent xmlns:mc="http://schemas.openxmlformats.org/markup-compatibility/2006" xmlns:a14="http://schemas.microsoft.com/office/drawing/2010/main">
+          <mc:Choice Requires="a14">
             <p:sp>
               <p:nvSpPr>
                 <p:cNvPr id="38" name="ZoneTexte 37">
@@ -13566,6 +15961,7 @@
                 </a:bodyPr>
                 <a:lstStyle/>
                 <a:p>
+                  <a:pPr/>
                   <a14:m>
                     <m:oMathPara xmlns:m="http://schemas.openxmlformats.org/officeDocument/2006/math">
                       <m:oMathParaPr>
@@ -13618,7 +16014,7 @@
               </p:txBody>
             </p:sp>
           </mc:Choice>
-          <mc:Fallback>
+          <mc:Fallback xmlns="">
             <p:sp>
               <p:nvSpPr>
                 <p:cNvPr id="38" name="ZoneTexte 37">
@@ -13717,8 +16113,8 @@
             </a:p>
           </p:txBody>
         </p:sp>
-        <mc:AlternateContent xmlns:mc="http://schemas.openxmlformats.org/markup-compatibility/2006">
-          <mc:Choice xmlns:a14="http://schemas.microsoft.com/office/drawing/2010/main" Requires="a14">
+        <mc:AlternateContent xmlns:mc="http://schemas.openxmlformats.org/markup-compatibility/2006" xmlns:a14="http://schemas.microsoft.com/office/drawing/2010/main">
+          <mc:Choice Requires="a14">
             <p:sp>
               <p:nvSpPr>
                 <p:cNvPr id="40" name="ZoneTexte 39">
@@ -13800,7 +16196,7 @@
               </p:txBody>
             </p:sp>
           </mc:Choice>
-          <mc:Fallback>
+          <mc:Fallback xmlns="">
             <p:sp>
               <p:nvSpPr>
                 <p:cNvPr id="40" name="ZoneTexte 39">
@@ -13846,8 +16242,8 @@
           </mc:Fallback>
         </mc:AlternateContent>
       </p:grpSp>
-      <mc:AlternateContent xmlns:mc="http://schemas.openxmlformats.org/markup-compatibility/2006">
-        <mc:Choice xmlns:a14="http://schemas.microsoft.com/office/drawing/2010/main" Requires="a14">
+      <mc:AlternateContent xmlns:mc="http://schemas.openxmlformats.org/markup-compatibility/2006" xmlns:a14="http://schemas.microsoft.com/office/drawing/2010/main">
+        <mc:Choice Requires="a14">
           <p:sp>
             <p:nvSpPr>
               <p:cNvPr id="42" name="ZoneTexte 41">
@@ -14045,7 +16441,7 @@
             </p:txBody>
           </p:sp>
         </mc:Choice>
-        <mc:Fallback>
+        <mc:Fallback xmlns="">
           <p:sp>
             <p:nvSpPr>
               <p:cNvPr id="42" name="ZoneTexte 41">
@@ -14090,8 +16486,8 @@
           </p:sp>
         </mc:Fallback>
       </mc:AlternateContent>
-      <mc:AlternateContent xmlns:mc="http://schemas.openxmlformats.org/markup-compatibility/2006">
-        <mc:Choice xmlns:a14="http://schemas.microsoft.com/office/drawing/2010/main" Requires="a14">
+      <mc:AlternateContent xmlns:mc="http://schemas.openxmlformats.org/markup-compatibility/2006" xmlns:a14="http://schemas.microsoft.com/office/drawing/2010/main">
+        <mc:Choice Requires="a14">
           <p:sp>
             <p:nvSpPr>
               <p:cNvPr id="43" name="ZoneTexte 42">
@@ -14289,7 +16685,7 @@
             </p:txBody>
           </p:sp>
         </mc:Choice>
-        <mc:Fallback>
+        <mc:Fallback xmlns="">
           <p:sp>
             <p:nvSpPr>
               <p:cNvPr id="43" name="ZoneTexte 42">
@@ -14347,7 +16743,7 @@
 </p:sld>
 </file>
 
-<file path=ppt/slides/slide4.xml><?xml version="1.0" encoding="utf-8"?>
+<file path=ppt/slides/slide5.xml><?xml version="1.0" encoding="utf-8"?>
 <p:sld xmlns:a="http://schemas.openxmlformats.org/drawingml/2006/main" xmlns:r="http://schemas.openxmlformats.org/officeDocument/2006/relationships" xmlns:p="http://schemas.openxmlformats.org/presentationml/2006/main">
   <p:cSld>
     <p:spTree>
@@ -15243,7 +17639,7 @@
 </p:sld>
 </file>
 
-<file path=ppt/slides/slide5.xml><?xml version="1.0" encoding="utf-8"?>
+<file path=ppt/slides/slide6.xml><?xml version="1.0" encoding="utf-8"?>
 <p:sld xmlns:a="http://schemas.openxmlformats.org/drawingml/2006/main" xmlns:r="http://schemas.openxmlformats.org/officeDocument/2006/relationships" xmlns:p="http://schemas.openxmlformats.org/presentationml/2006/main">
   <p:cSld>
     <p:spTree>
@@ -16437,7 +18833,7 @@
 </p:sld>
 </file>
 
-<file path=ppt/slides/slide6.xml><?xml version="1.0" encoding="utf-8"?>
+<file path=ppt/slides/slide7.xml><?xml version="1.0" encoding="utf-8"?>
 <p:sld xmlns:a="http://schemas.openxmlformats.org/drawingml/2006/main" xmlns:r="http://schemas.openxmlformats.org/officeDocument/2006/relationships" xmlns:p="http://schemas.openxmlformats.org/presentationml/2006/main">
   <p:cSld>
     <p:spTree>
@@ -18488,7 +20884,7 @@
 </p:sld>
 </file>
 
-<file path=ppt/slides/slide7.xml><?xml version="1.0" encoding="utf-8"?>
+<file path=ppt/slides/slide8.xml><?xml version="1.0" encoding="utf-8"?>
 <p:sld xmlns:a="http://schemas.openxmlformats.org/drawingml/2006/main" xmlns:r="http://schemas.openxmlformats.org/officeDocument/2006/relationships" xmlns:p="http://schemas.openxmlformats.org/presentationml/2006/main">
   <p:cSld>
     <p:spTree>
@@ -19946,7 +22342,7 @@
 </p:sld>
 </file>
 
-<file path=ppt/slides/slide8.xml><?xml version="1.0" encoding="utf-8"?>
+<file path=ppt/slides/slide9.xml><?xml version="1.0" encoding="utf-8"?>
 <p:sld xmlns:a="http://schemas.openxmlformats.org/drawingml/2006/main" xmlns:r="http://schemas.openxmlformats.org/officeDocument/2006/relationships" xmlns:p="http://schemas.openxmlformats.org/presentationml/2006/main">
   <p:cSld>
     <p:spTree>
@@ -22144,1987 +24540,6 @@
 </p:sld>
 </file>
 
-<file path=ppt/slides/slide9.xml><?xml version="1.0" encoding="utf-8"?>
-<p:sld xmlns:a="http://schemas.openxmlformats.org/drawingml/2006/main" xmlns:r="http://schemas.openxmlformats.org/officeDocument/2006/relationships" xmlns:p="http://schemas.openxmlformats.org/presentationml/2006/main">
-  <p:cSld>
-    <p:spTree>
-      <p:nvGrpSpPr>
-        <p:cNvPr id="1" name=""/>
-        <p:cNvGrpSpPr/>
-        <p:nvPr/>
-      </p:nvGrpSpPr>
-      <p:grpSpPr>
-        <a:xfrm>
-          <a:off x="0" y="0"/>
-          <a:ext cx="0" cy="0"/>
-          <a:chOff x="0" y="0"/>
-          <a:chExt cx="0" cy="0"/>
-        </a:xfrm>
-      </p:grpSpPr>
-      <p:cxnSp>
-        <p:nvCxnSpPr>
-          <p:cNvPr id="4" name="Connecteur droit 3"/>
-          <p:cNvCxnSpPr/>
-          <p:nvPr/>
-        </p:nvCxnSpPr>
-        <p:spPr>
-          <a:xfrm>
-            <a:off x="971600" y="1989437"/>
-            <a:ext cx="576064" cy="0"/>
-          </a:xfrm>
-          <a:prstGeom prst="line">
-            <a:avLst/>
-          </a:prstGeom>
-          <a:ln w="28575">
-            <a:solidFill>
-              <a:srgbClr val="0070C0"/>
-            </a:solidFill>
-          </a:ln>
-        </p:spPr>
-        <p:style>
-          <a:lnRef idx="1">
-            <a:schemeClr val="accent1"/>
-          </a:lnRef>
-          <a:fillRef idx="0">
-            <a:schemeClr val="accent1"/>
-          </a:fillRef>
-          <a:effectRef idx="0">
-            <a:schemeClr val="accent1"/>
-          </a:effectRef>
-          <a:fontRef idx="minor">
-            <a:schemeClr val="tx1"/>
-          </a:fontRef>
-        </p:style>
-      </p:cxnSp>
-      <p:cxnSp>
-        <p:nvCxnSpPr>
-          <p:cNvPr id="7" name="Connecteur droit 6"/>
-          <p:cNvCxnSpPr/>
-          <p:nvPr/>
-        </p:nvCxnSpPr>
-        <p:spPr>
-          <a:xfrm flipV="1">
-            <a:off x="971600" y="1058715"/>
-            <a:ext cx="0" cy="1072549"/>
-          </a:xfrm>
-          <a:prstGeom prst="line">
-            <a:avLst/>
-          </a:prstGeom>
-          <a:ln w="28575">
-            <a:solidFill>
-              <a:srgbClr val="0070C0"/>
-            </a:solidFill>
-          </a:ln>
-        </p:spPr>
-        <p:style>
-          <a:lnRef idx="1">
-            <a:schemeClr val="accent1"/>
-          </a:lnRef>
-          <a:fillRef idx="0">
-            <a:schemeClr val="accent1"/>
-          </a:fillRef>
-          <a:effectRef idx="0">
-            <a:schemeClr val="accent1"/>
-          </a:effectRef>
-          <a:fontRef idx="minor">
-            <a:schemeClr val="tx1"/>
-          </a:fontRef>
-        </p:style>
-      </p:cxnSp>
-      <p:cxnSp>
-        <p:nvCxnSpPr>
-          <p:cNvPr id="11" name="Connecteur droit 10"/>
-          <p:cNvCxnSpPr/>
-          <p:nvPr/>
-        </p:nvCxnSpPr>
-        <p:spPr>
-          <a:xfrm>
-            <a:off x="1547664" y="1775878"/>
-            <a:ext cx="0" cy="217616"/>
-          </a:xfrm>
-          <a:prstGeom prst="line">
-            <a:avLst/>
-          </a:prstGeom>
-          <a:ln w="28575">
-            <a:solidFill>
-              <a:srgbClr val="0070C0"/>
-            </a:solidFill>
-          </a:ln>
-        </p:spPr>
-        <p:style>
-          <a:lnRef idx="1">
-            <a:schemeClr val="accent1"/>
-          </a:lnRef>
-          <a:fillRef idx="0">
-            <a:schemeClr val="accent1"/>
-          </a:fillRef>
-          <a:effectRef idx="0">
-            <a:schemeClr val="accent1"/>
-          </a:effectRef>
-          <a:fontRef idx="minor">
-            <a:schemeClr val="tx1"/>
-          </a:fontRef>
-        </p:style>
-      </p:cxnSp>
-      <p:cxnSp>
-        <p:nvCxnSpPr>
-          <p:cNvPr id="14" name="Connecteur droit 13"/>
-          <p:cNvCxnSpPr/>
-          <p:nvPr/>
-        </p:nvCxnSpPr>
-        <p:spPr>
-          <a:xfrm>
-            <a:off x="1457864" y="1775878"/>
-            <a:ext cx="377832" cy="216024"/>
-          </a:xfrm>
-          <a:prstGeom prst="line">
-            <a:avLst/>
-          </a:prstGeom>
-          <a:ln w="28575">
-            <a:solidFill>
-              <a:srgbClr val="0070C0"/>
-            </a:solidFill>
-          </a:ln>
-        </p:spPr>
-        <p:style>
-          <a:lnRef idx="1">
-            <a:schemeClr val="accent1"/>
-          </a:lnRef>
-          <a:fillRef idx="0">
-            <a:schemeClr val="accent1"/>
-          </a:fillRef>
-          <a:effectRef idx="0">
-            <a:schemeClr val="accent1"/>
-          </a:effectRef>
-          <a:fontRef idx="minor">
-            <a:schemeClr val="tx1"/>
-          </a:fontRef>
-        </p:style>
-      </p:cxnSp>
-      <p:cxnSp>
-        <p:nvCxnSpPr>
-          <p:cNvPr id="24" name="Connecteur droit 23"/>
-          <p:cNvCxnSpPr/>
-          <p:nvPr/>
-        </p:nvCxnSpPr>
-        <p:spPr>
-          <a:xfrm>
-            <a:off x="971600" y="1267168"/>
-            <a:ext cx="1800200" cy="0"/>
-          </a:xfrm>
-          <a:prstGeom prst="line">
-            <a:avLst/>
-          </a:prstGeom>
-          <a:ln w="28575">
-            <a:solidFill>
-              <a:srgbClr val="0070C0"/>
-            </a:solidFill>
-          </a:ln>
-        </p:spPr>
-        <p:style>
-          <a:lnRef idx="1">
-            <a:schemeClr val="accent1"/>
-          </a:lnRef>
-          <a:fillRef idx="0">
-            <a:schemeClr val="accent1"/>
-          </a:fillRef>
-          <a:effectRef idx="0">
-            <a:schemeClr val="accent1"/>
-          </a:effectRef>
-          <a:fontRef idx="minor">
-            <a:schemeClr val="tx1"/>
-          </a:fontRef>
-        </p:style>
-      </p:cxnSp>
-      <p:cxnSp>
-        <p:nvCxnSpPr>
-          <p:cNvPr id="27" name="Connecteur droit 26"/>
-          <p:cNvCxnSpPr/>
-          <p:nvPr/>
-        </p:nvCxnSpPr>
-        <p:spPr>
-          <a:xfrm>
-            <a:off x="1816520" y="1987248"/>
-            <a:ext cx="955280" cy="1592"/>
-          </a:xfrm>
-          <a:prstGeom prst="line">
-            <a:avLst/>
-          </a:prstGeom>
-          <a:ln w="28575">
-            <a:solidFill>
-              <a:srgbClr val="0070C0"/>
-            </a:solidFill>
-          </a:ln>
-        </p:spPr>
-        <p:style>
-          <a:lnRef idx="1">
-            <a:schemeClr val="accent1"/>
-          </a:lnRef>
-          <a:fillRef idx="0">
-            <a:schemeClr val="accent1"/>
-          </a:fillRef>
-          <a:effectRef idx="0">
-            <a:schemeClr val="accent1"/>
-          </a:effectRef>
-          <a:fontRef idx="minor">
-            <a:schemeClr val="tx1"/>
-          </a:fontRef>
-        </p:style>
-      </p:cxnSp>
-      <p:cxnSp>
-        <p:nvCxnSpPr>
-          <p:cNvPr id="28" name="Connecteur droit 27"/>
-          <p:cNvCxnSpPr/>
-          <p:nvPr/>
-        </p:nvCxnSpPr>
-        <p:spPr>
-          <a:xfrm>
-            <a:off x="3131840" y="1267168"/>
-            <a:ext cx="360040" cy="0"/>
-          </a:xfrm>
-          <a:prstGeom prst="line">
-            <a:avLst/>
-          </a:prstGeom>
-          <a:ln w="28575">
-            <a:solidFill>
-              <a:srgbClr val="0070C0"/>
-            </a:solidFill>
-          </a:ln>
-        </p:spPr>
-        <p:style>
-          <a:lnRef idx="1">
-            <a:schemeClr val="accent1"/>
-          </a:lnRef>
-          <a:fillRef idx="0">
-            <a:schemeClr val="accent1"/>
-          </a:fillRef>
-          <a:effectRef idx="0">
-            <a:schemeClr val="accent1"/>
-          </a:effectRef>
-          <a:fontRef idx="minor">
-            <a:schemeClr val="tx1"/>
-          </a:fontRef>
-        </p:style>
-      </p:cxnSp>
-      <p:cxnSp>
-        <p:nvCxnSpPr>
-          <p:cNvPr id="29" name="Connecteur droit 28"/>
-          <p:cNvCxnSpPr/>
-          <p:nvPr/>
-        </p:nvCxnSpPr>
-        <p:spPr>
-          <a:xfrm>
-            <a:off x="3131840" y="1988840"/>
-            <a:ext cx="360040" cy="0"/>
-          </a:xfrm>
-          <a:prstGeom prst="line">
-            <a:avLst/>
-          </a:prstGeom>
-          <a:ln w="28575">
-            <a:solidFill>
-              <a:srgbClr val="0070C0"/>
-            </a:solidFill>
-          </a:ln>
-        </p:spPr>
-        <p:style>
-          <a:lnRef idx="1">
-            <a:schemeClr val="accent1"/>
-          </a:lnRef>
-          <a:fillRef idx="0">
-            <a:schemeClr val="accent1"/>
-          </a:fillRef>
-          <a:effectRef idx="0">
-            <a:schemeClr val="accent1"/>
-          </a:effectRef>
-          <a:fontRef idx="minor">
-            <a:schemeClr val="tx1"/>
-          </a:fontRef>
-        </p:style>
-      </p:cxnSp>
-      <p:cxnSp>
-        <p:nvCxnSpPr>
-          <p:cNvPr id="30" name="Connecteur droit 29"/>
-          <p:cNvCxnSpPr/>
-          <p:nvPr/>
-        </p:nvCxnSpPr>
-        <p:spPr>
-          <a:xfrm flipV="1">
-            <a:off x="3491880" y="1267168"/>
-            <a:ext cx="0" cy="720080"/>
-          </a:xfrm>
-          <a:prstGeom prst="line">
-            <a:avLst/>
-          </a:prstGeom>
-          <a:ln w="28575">
-            <a:solidFill>
-              <a:srgbClr val="0070C0"/>
-            </a:solidFill>
-          </a:ln>
-        </p:spPr>
-        <p:style>
-          <a:lnRef idx="1">
-            <a:schemeClr val="accent1"/>
-          </a:lnRef>
-          <a:fillRef idx="0">
-            <a:schemeClr val="accent1"/>
-          </a:fillRef>
-          <a:effectRef idx="0">
-            <a:schemeClr val="accent1"/>
-          </a:effectRef>
-          <a:fontRef idx="minor">
-            <a:schemeClr val="tx1"/>
-          </a:fontRef>
-        </p:style>
-      </p:cxnSp>
-      <p:cxnSp>
-        <p:nvCxnSpPr>
-          <p:cNvPr id="31" name="Connecteur droit 30"/>
-          <p:cNvCxnSpPr/>
-          <p:nvPr/>
-        </p:nvCxnSpPr>
-        <p:spPr>
-          <a:xfrm flipH="1">
-            <a:off x="2771800" y="1268760"/>
-            <a:ext cx="360040" cy="144016"/>
-          </a:xfrm>
-          <a:prstGeom prst="line">
-            <a:avLst/>
-          </a:prstGeom>
-          <a:ln w="28575">
-            <a:solidFill>
-              <a:srgbClr val="0070C0"/>
-            </a:solidFill>
-          </a:ln>
-        </p:spPr>
-        <p:style>
-          <a:lnRef idx="1">
-            <a:schemeClr val="accent1"/>
-          </a:lnRef>
-          <a:fillRef idx="0">
-            <a:schemeClr val="accent1"/>
-          </a:fillRef>
-          <a:effectRef idx="0">
-            <a:schemeClr val="accent1"/>
-          </a:effectRef>
-          <a:fontRef idx="minor">
-            <a:schemeClr val="tx1"/>
-          </a:fontRef>
-        </p:style>
-      </p:cxnSp>
-      <p:cxnSp>
-        <p:nvCxnSpPr>
-          <p:cNvPr id="34" name="Connecteur droit 33"/>
-          <p:cNvCxnSpPr/>
-          <p:nvPr/>
-        </p:nvCxnSpPr>
-        <p:spPr>
-          <a:xfrm flipH="1">
-            <a:off x="2775655" y="1987248"/>
-            <a:ext cx="360040" cy="144016"/>
-          </a:xfrm>
-          <a:prstGeom prst="line">
-            <a:avLst/>
-          </a:prstGeom>
-          <a:ln w="28575">
-            <a:solidFill>
-              <a:srgbClr val="0070C0"/>
-            </a:solidFill>
-          </a:ln>
-        </p:spPr>
-        <p:style>
-          <a:lnRef idx="1">
-            <a:schemeClr val="accent1"/>
-          </a:lnRef>
-          <a:fillRef idx="0">
-            <a:schemeClr val="accent1"/>
-          </a:fillRef>
-          <a:effectRef idx="0">
-            <a:schemeClr val="accent1"/>
-          </a:effectRef>
-          <a:fontRef idx="minor">
-            <a:schemeClr val="tx1"/>
-          </a:fontRef>
-        </p:style>
-      </p:cxnSp>
-      <p:cxnSp>
-        <p:nvCxnSpPr>
-          <p:cNvPr id="35" name="Connecteur droit 34"/>
-          <p:cNvCxnSpPr/>
-          <p:nvPr/>
-        </p:nvCxnSpPr>
-        <p:spPr>
-          <a:xfrm>
-            <a:off x="3491880" y="1607079"/>
-            <a:ext cx="381380" cy="0"/>
-          </a:xfrm>
-          <a:prstGeom prst="line">
-            <a:avLst/>
-          </a:prstGeom>
-          <a:ln w="28575">
-            <a:solidFill>
-              <a:srgbClr val="0070C0"/>
-            </a:solidFill>
-          </a:ln>
-        </p:spPr>
-        <p:style>
-          <a:lnRef idx="1">
-            <a:schemeClr val="accent1"/>
-          </a:lnRef>
-          <a:fillRef idx="0">
-            <a:schemeClr val="accent1"/>
-          </a:fillRef>
-          <a:effectRef idx="0">
-            <a:schemeClr val="accent1"/>
-          </a:effectRef>
-          <a:fontRef idx="minor">
-            <a:schemeClr val="tx1"/>
-          </a:fontRef>
-        </p:style>
-      </p:cxnSp>
-      <p:sp>
-        <p:nvSpPr>
-          <p:cNvPr id="37" name="Rectangle 36"/>
-          <p:cNvSpPr/>
-          <p:nvPr/>
-        </p:nvSpPr>
-        <p:spPr>
-          <a:xfrm>
-            <a:off x="3873260" y="1320639"/>
-            <a:ext cx="269462" cy="572880"/>
-          </a:xfrm>
-          <a:prstGeom prst="rect">
-            <a:avLst/>
-          </a:prstGeom>
-          <a:ln w="28575">
-            <a:solidFill>
-              <a:srgbClr val="0070C0"/>
-            </a:solidFill>
-          </a:ln>
-        </p:spPr>
-        <p:style>
-          <a:lnRef idx="1">
-            <a:schemeClr val="accent1"/>
-          </a:lnRef>
-          <a:fillRef idx="0">
-            <a:schemeClr val="accent1"/>
-          </a:fillRef>
-          <a:effectRef idx="0">
-            <a:schemeClr val="accent1"/>
-          </a:effectRef>
-          <a:fontRef idx="minor">
-            <a:schemeClr val="tx1"/>
-          </a:fontRef>
-        </p:style>
-        <p:txBody>
-          <a:bodyPr rtlCol="0" anchor="ctr"/>
-          <a:lstStyle/>
-          <a:p>
-            <a:pPr algn="ctr"/>
-            <a:endParaRPr lang="fr-FR"/>
-          </a:p>
-        </p:txBody>
-      </p:sp>
-      <p:cxnSp>
-        <p:nvCxnSpPr>
-          <p:cNvPr id="38" name="Connecteur droit 37"/>
-          <p:cNvCxnSpPr/>
-          <p:nvPr/>
-        </p:nvCxnSpPr>
-        <p:spPr>
-          <a:xfrm flipH="1" flipV="1">
-            <a:off x="3873260" y="1412777"/>
-            <a:ext cx="269462" cy="346702"/>
-          </a:xfrm>
-          <a:prstGeom prst="line">
-            <a:avLst/>
-          </a:prstGeom>
-          <a:ln w="28575">
-            <a:solidFill>
-              <a:srgbClr val="0070C0"/>
-            </a:solidFill>
-          </a:ln>
-        </p:spPr>
-        <p:style>
-          <a:lnRef idx="1">
-            <a:schemeClr val="accent1"/>
-          </a:lnRef>
-          <a:fillRef idx="0">
-            <a:schemeClr val="accent1"/>
-          </a:fillRef>
-          <a:effectRef idx="0">
-            <a:schemeClr val="accent1"/>
-          </a:effectRef>
-          <a:fontRef idx="minor">
-            <a:schemeClr val="tx1"/>
-          </a:fontRef>
-        </p:style>
-      </p:cxnSp>
-      <p:cxnSp>
-        <p:nvCxnSpPr>
-          <p:cNvPr id="41" name="Connecteur droit 40"/>
-          <p:cNvCxnSpPr/>
-          <p:nvPr/>
-        </p:nvCxnSpPr>
-        <p:spPr>
-          <a:xfrm>
-            <a:off x="4142722" y="1607079"/>
-            <a:ext cx="418452" cy="0"/>
-          </a:xfrm>
-          <a:prstGeom prst="line">
-            <a:avLst/>
-          </a:prstGeom>
-          <a:ln w="28575">
-            <a:solidFill>
-              <a:srgbClr val="0070C0"/>
-            </a:solidFill>
-          </a:ln>
-        </p:spPr>
-        <p:style>
-          <a:lnRef idx="1">
-            <a:schemeClr val="accent1"/>
-          </a:lnRef>
-          <a:fillRef idx="0">
-            <a:schemeClr val="accent1"/>
-          </a:fillRef>
-          <a:effectRef idx="0">
-            <a:schemeClr val="accent1"/>
-          </a:effectRef>
-          <a:fontRef idx="minor">
-            <a:schemeClr val="tx1"/>
-          </a:fontRef>
-        </p:style>
-      </p:cxnSp>
-      <p:cxnSp>
-        <p:nvCxnSpPr>
-          <p:cNvPr id="42" name="Connecteur droit 41"/>
-          <p:cNvCxnSpPr/>
-          <p:nvPr/>
-        </p:nvCxnSpPr>
-        <p:spPr>
-          <a:xfrm flipV="1">
-            <a:off x="4561174" y="1247039"/>
-            <a:ext cx="0" cy="720080"/>
-          </a:xfrm>
-          <a:prstGeom prst="line">
-            <a:avLst/>
-          </a:prstGeom>
-          <a:ln w="28575">
-            <a:solidFill>
-              <a:srgbClr val="0070C0"/>
-            </a:solidFill>
-          </a:ln>
-        </p:spPr>
-        <p:style>
-          <a:lnRef idx="1">
-            <a:schemeClr val="accent1"/>
-          </a:lnRef>
-          <a:fillRef idx="0">
-            <a:schemeClr val="accent1"/>
-          </a:fillRef>
-          <a:effectRef idx="0">
-            <a:schemeClr val="accent1"/>
-          </a:effectRef>
-          <a:fontRef idx="minor">
-            <a:schemeClr val="tx1"/>
-          </a:fontRef>
-        </p:style>
-      </p:cxnSp>
-      <mc:AlternateContent xmlns:mc="http://schemas.openxmlformats.org/markup-compatibility/2006" xmlns:a14="http://schemas.microsoft.com/office/drawing/2010/main">
-        <mc:Choice Requires="a14">
-          <p:sp>
-            <p:nvSpPr>
-              <p:cNvPr id="45" name="ZoneTexte 44"/>
-              <p:cNvSpPr txBox="1"/>
-              <p:nvPr/>
-            </p:nvSpPr>
-            <p:spPr>
-              <a:xfrm>
-                <a:off x="1507208" y="2143682"/>
-                <a:ext cx="328488" cy="307777"/>
-              </a:xfrm>
-              <a:prstGeom prst="rect">
-                <a:avLst/>
-              </a:prstGeom>
-              <a:noFill/>
-            </p:spPr>
-            <p:txBody>
-              <a:bodyPr wrap="none" rtlCol="0">
-                <a:spAutoFit/>
-              </a:bodyPr>
-              <a:lstStyle/>
-              <a:p>
-                <a:pPr/>
-                <a14:m>
-                  <m:oMathPara xmlns:m="http://schemas.openxmlformats.org/officeDocument/2006/math">
-                    <m:oMathParaPr>
-                      <m:jc m:val="centerGroup"/>
-                    </m:oMathParaPr>
-                    <m:oMath xmlns:m="http://schemas.openxmlformats.org/officeDocument/2006/math">
-                      <m:acc>
-                        <m:accPr>
-                          <m:chr m:val="̅"/>
-                          <m:ctrlPr>
-                            <a:rPr lang="fr-FR" sz="1400" i="1" smtClean="0">
-                              <a:latin typeface="Cambria Math" panose="02040503050406030204" pitchFamily="18" charset="0"/>
-                            </a:rPr>
-                          </m:ctrlPr>
-                        </m:accPr>
-                        <m:e>
-                          <m:r>
-                            <a:rPr lang="fr-FR" sz="1400" b="0" i="1" smtClean="0">
-                              <a:latin typeface="Cambria Math"/>
-                            </a:rPr>
-                            <m:t>𝑎</m:t>
-                          </m:r>
-                        </m:e>
-                      </m:acc>
-                    </m:oMath>
-                  </m:oMathPara>
-                </a14:m>
-                <a:endParaRPr lang="fr-FR" dirty="0"/>
-              </a:p>
-            </p:txBody>
-          </p:sp>
-        </mc:Choice>
-        <mc:Fallback xmlns="">
-          <p:sp>
-            <p:nvSpPr>
-              <p:cNvPr id="45" name="ZoneTexte 44"/>
-              <p:cNvSpPr txBox="1">
-                <a:spLocks noRot="1" noChangeAspect="1" noMove="1" noResize="1" noEditPoints="1" noAdjustHandles="1" noChangeArrowheads="1" noChangeShapeType="1" noTextEdit="1"/>
-              </p:cNvSpPr>
-              <p:nvPr/>
-            </p:nvSpPr>
-            <p:spPr>
-              <a:xfrm>
-                <a:off x="1507208" y="2143682"/>
-                <a:ext cx="328488" cy="307777"/>
-              </a:xfrm>
-              <a:prstGeom prst="rect">
-                <a:avLst/>
-              </a:prstGeom>
-              <a:blipFill rotWithShape="1">
-                <a:blip r:embed="rId2"/>
-                <a:stretch>
-                  <a:fillRect/>
-                </a:stretch>
-              </a:blipFill>
-            </p:spPr>
-            <p:txBody>
-              <a:bodyPr/>
-              <a:lstStyle/>
-              <a:p>
-                <a:r>
-                  <a:rPr lang="fr-FR">
-                    <a:noFill/>
-                  </a:rPr>
-                  <a:t> </a:t>
-                </a:r>
-              </a:p>
-            </p:txBody>
-          </p:sp>
-        </mc:Fallback>
-      </mc:AlternateContent>
-      <mc:AlternateContent xmlns:mc="http://schemas.openxmlformats.org/markup-compatibility/2006" xmlns:a14="http://schemas.microsoft.com/office/drawing/2010/main">
-        <mc:Choice Requires="a14">
-          <p:sp>
-            <p:nvSpPr>
-              <p:cNvPr id="46" name="ZoneTexte 45"/>
-              <p:cNvSpPr txBox="1"/>
-              <p:nvPr/>
-            </p:nvSpPr>
-            <p:spPr>
-              <a:xfrm>
-                <a:off x="2791431" y="904827"/>
-                <a:ext cx="378502" cy="307777"/>
-              </a:xfrm>
-              <a:prstGeom prst="rect">
-                <a:avLst/>
-              </a:prstGeom>
-              <a:noFill/>
-            </p:spPr>
-            <p:txBody>
-              <a:bodyPr wrap="none" rtlCol="0">
-                <a:spAutoFit/>
-              </a:bodyPr>
-              <a:lstStyle/>
-              <a:p>
-                <a:pPr/>
-                <a14:m>
-                  <m:oMathPara xmlns:m="http://schemas.openxmlformats.org/officeDocument/2006/math">
-                    <m:oMathParaPr>
-                      <m:jc m:val="centerGroup"/>
-                    </m:oMathParaPr>
-                    <m:oMath xmlns:m="http://schemas.openxmlformats.org/officeDocument/2006/math">
-                      <m:r>
-                        <a:rPr lang="fr-FR" sz="1400" b="0" i="1" smtClean="0">
-                          <a:latin typeface="Cambria Math"/>
-                        </a:rPr>
-                        <m:t>𝑚</m:t>
-                      </m:r>
-                    </m:oMath>
-                  </m:oMathPara>
-                </a14:m>
-                <a:endParaRPr lang="fr-FR" dirty="0"/>
-              </a:p>
-            </p:txBody>
-          </p:sp>
-        </mc:Choice>
-        <mc:Fallback xmlns="">
-          <p:sp>
-            <p:nvSpPr>
-              <p:cNvPr id="46" name="ZoneTexte 45"/>
-              <p:cNvSpPr txBox="1">
-                <a:spLocks noRot="1" noChangeAspect="1" noMove="1" noResize="1" noEditPoints="1" noAdjustHandles="1" noChangeArrowheads="1" noChangeShapeType="1" noTextEdit="1"/>
-              </p:cNvSpPr>
-              <p:nvPr/>
-            </p:nvSpPr>
-            <p:spPr>
-              <a:xfrm>
-                <a:off x="2791431" y="904827"/>
-                <a:ext cx="378502" cy="307777"/>
-              </a:xfrm>
-              <a:prstGeom prst="rect">
-                <a:avLst/>
-              </a:prstGeom>
-              <a:blipFill rotWithShape="1">
-                <a:blip r:embed="rId3"/>
-                <a:stretch>
-                  <a:fillRect/>
-                </a:stretch>
-              </a:blipFill>
-            </p:spPr>
-            <p:txBody>
-              <a:bodyPr/>
-              <a:lstStyle/>
-              <a:p>
-                <a:r>
-                  <a:rPr lang="fr-FR">
-                    <a:noFill/>
-                  </a:rPr>
-                  <a:t> </a:t>
-                </a:r>
-              </a:p>
-            </p:txBody>
-          </p:sp>
-        </mc:Fallback>
-      </mc:AlternateContent>
-      <mc:AlternateContent xmlns:mc="http://schemas.openxmlformats.org/markup-compatibility/2006" xmlns:a14="http://schemas.microsoft.com/office/drawing/2010/main">
-        <mc:Choice Requires="a14">
-          <p:sp>
-            <p:nvSpPr>
-              <p:cNvPr id="47" name="ZoneTexte 46"/>
-              <p:cNvSpPr txBox="1"/>
-              <p:nvPr/>
-            </p:nvSpPr>
-            <p:spPr>
-              <a:xfrm>
-                <a:off x="2956164" y="1709484"/>
-                <a:ext cx="326371" cy="307777"/>
-              </a:xfrm>
-              <a:prstGeom prst="rect">
-                <a:avLst/>
-              </a:prstGeom>
-              <a:noFill/>
-            </p:spPr>
-            <p:txBody>
-              <a:bodyPr wrap="none" rtlCol="0">
-                <a:spAutoFit/>
-              </a:bodyPr>
-              <a:lstStyle/>
-              <a:p>
-                <a:pPr/>
-                <a14:m>
-                  <m:oMathPara xmlns:m="http://schemas.openxmlformats.org/officeDocument/2006/math">
-                    <m:oMathParaPr>
-                      <m:jc m:val="centerGroup"/>
-                    </m:oMathParaPr>
-                    <m:oMath xmlns:m="http://schemas.openxmlformats.org/officeDocument/2006/math">
-                      <m:r>
-                        <a:rPr lang="fr-FR" sz="1400" b="0" i="1" smtClean="0">
-                          <a:latin typeface="Cambria Math"/>
-                        </a:rPr>
-                        <m:t>𝑥</m:t>
-                      </m:r>
-                    </m:oMath>
-                  </m:oMathPara>
-                </a14:m>
-                <a:endParaRPr lang="fr-FR" dirty="0"/>
-              </a:p>
-            </p:txBody>
-          </p:sp>
-        </mc:Choice>
-        <mc:Fallback xmlns="">
-          <p:sp>
-            <p:nvSpPr>
-              <p:cNvPr id="47" name="ZoneTexte 46"/>
-              <p:cNvSpPr txBox="1">
-                <a:spLocks noRot="1" noChangeAspect="1" noMove="1" noResize="1" noEditPoints="1" noAdjustHandles="1" noChangeArrowheads="1" noChangeShapeType="1" noTextEdit="1"/>
-              </p:cNvSpPr>
-              <p:nvPr/>
-            </p:nvSpPr>
-            <p:spPr>
-              <a:xfrm>
-                <a:off x="2956164" y="1709484"/>
-                <a:ext cx="326371" cy="307777"/>
-              </a:xfrm>
-              <a:prstGeom prst="rect">
-                <a:avLst/>
-              </a:prstGeom>
-              <a:blipFill rotWithShape="1">
-                <a:blip r:embed="rId4"/>
-                <a:stretch>
-                  <a:fillRect/>
-                </a:stretch>
-              </a:blipFill>
-            </p:spPr>
-            <p:txBody>
-              <a:bodyPr/>
-              <a:lstStyle/>
-              <a:p>
-                <a:r>
-                  <a:rPr lang="fr-FR">
-                    <a:noFill/>
-                  </a:rPr>
-                  <a:t> </a:t>
-                </a:r>
-              </a:p>
-            </p:txBody>
-          </p:sp>
-        </mc:Fallback>
-      </mc:AlternateContent>
-      <p:cxnSp>
-        <p:nvCxnSpPr>
-          <p:cNvPr id="48" name="Connecteur droit 47"/>
-          <p:cNvCxnSpPr/>
-          <p:nvPr/>
-        </p:nvCxnSpPr>
-        <p:spPr>
-          <a:xfrm flipV="1">
-            <a:off x="971600" y="2348880"/>
-            <a:ext cx="0" cy="720080"/>
-          </a:xfrm>
-          <a:prstGeom prst="line">
-            <a:avLst/>
-          </a:prstGeom>
-          <a:ln w="28575">
-            <a:solidFill>
-              <a:srgbClr val="0070C0"/>
-            </a:solidFill>
-          </a:ln>
-        </p:spPr>
-        <p:style>
-          <a:lnRef idx="1">
-            <a:schemeClr val="accent1"/>
-          </a:lnRef>
-          <a:fillRef idx="0">
-            <a:schemeClr val="accent1"/>
-          </a:fillRef>
-          <a:effectRef idx="0">
-            <a:schemeClr val="accent1"/>
-          </a:effectRef>
-          <a:fontRef idx="minor">
-            <a:schemeClr val="tx1"/>
-          </a:fontRef>
-        </p:style>
-      </p:cxnSp>
-      <p:cxnSp>
-        <p:nvCxnSpPr>
-          <p:cNvPr id="49" name="Connecteur droit 48"/>
-          <p:cNvCxnSpPr/>
-          <p:nvPr/>
-        </p:nvCxnSpPr>
-        <p:spPr>
-          <a:xfrm flipV="1">
-            <a:off x="4561174" y="2348880"/>
-            <a:ext cx="0" cy="720080"/>
-          </a:xfrm>
-          <a:prstGeom prst="line">
-            <a:avLst/>
-          </a:prstGeom>
-          <a:ln w="28575">
-            <a:solidFill>
-              <a:srgbClr val="0070C0"/>
-            </a:solidFill>
-          </a:ln>
-        </p:spPr>
-        <p:style>
-          <a:lnRef idx="1">
-            <a:schemeClr val="accent1"/>
-          </a:lnRef>
-          <a:fillRef idx="0">
-            <a:schemeClr val="accent1"/>
-          </a:fillRef>
-          <a:effectRef idx="0">
-            <a:schemeClr val="accent1"/>
-          </a:effectRef>
-          <a:fontRef idx="minor">
-            <a:schemeClr val="tx1"/>
-          </a:fontRef>
-        </p:style>
-      </p:cxnSp>
-      <p:cxnSp>
-        <p:nvCxnSpPr>
-          <p:cNvPr id="50" name="Connecteur droit 49"/>
-          <p:cNvCxnSpPr/>
-          <p:nvPr/>
-        </p:nvCxnSpPr>
-        <p:spPr>
-          <a:xfrm>
-            <a:off x="2980682" y="1340768"/>
-            <a:ext cx="0" cy="245360"/>
-          </a:xfrm>
-          <a:prstGeom prst="line">
-            <a:avLst/>
-          </a:prstGeom>
-          <a:ln w="28575">
-            <a:solidFill>
-              <a:srgbClr val="0070C0"/>
-            </a:solidFill>
-            <a:prstDash val="sysDash"/>
-          </a:ln>
-        </p:spPr>
-        <p:style>
-          <a:lnRef idx="1">
-            <a:schemeClr val="accent1"/>
-          </a:lnRef>
-          <a:fillRef idx="0">
-            <a:schemeClr val="accent1"/>
-          </a:fillRef>
-          <a:effectRef idx="0">
-            <a:schemeClr val="accent1"/>
-          </a:effectRef>
-          <a:fontRef idx="minor">
-            <a:schemeClr val="tx1"/>
-          </a:fontRef>
-        </p:style>
-      </p:cxnSp>
-      <p:cxnSp>
-        <p:nvCxnSpPr>
-          <p:cNvPr id="53" name="Connecteur droit 52"/>
-          <p:cNvCxnSpPr/>
-          <p:nvPr/>
-        </p:nvCxnSpPr>
-        <p:spPr>
-          <a:xfrm>
-            <a:off x="2855841" y="1579391"/>
-            <a:ext cx="249681" cy="0"/>
-          </a:xfrm>
-          <a:prstGeom prst="line">
-            <a:avLst/>
-          </a:prstGeom>
-          <a:ln w="28575">
-            <a:solidFill>
-              <a:srgbClr val="0070C0"/>
-            </a:solidFill>
-          </a:ln>
-        </p:spPr>
-        <p:style>
-          <a:lnRef idx="1">
-            <a:schemeClr val="accent1"/>
-          </a:lnRef>
-          <a:fillRef idx="0">
-            <a:schemeClr val="accent1"/>
-          </a:fillRef>
-          <a:effectRef idx="0">
-            <a:schemeClr val="accent1"/>
-          </a:effectRef>
-          <a:fontRef idx="minor">
-            <a:schemeClr val="tx1"/>
-          </a:fontRef>
-        </p:style>
-      </p:cxnSp>
-      <p:cxnSp>
-        <p:nvCxnSpPr>
-          <p:cNvPr id="55" name="Connecteur droit 54"/>
-          <p:cNvCxnSpPr/>
-          <p:nvPr/>
-        </p:nvCxnSpPr>
-        <p:spPr>
-          <a:xfrm>
-            <a:off x="3093262" y="1470072"/>
-            <a:ext cx="0" cy="115943"/>
-          </a:xfrm>
-          <a:prstGeom prst="line">
-            <a:avLst/>
-          </a:prstGeom>
-          <a:ln w="28575">
-            <a:solidFill>
-              <a:srgbClr val="0070C0"/>
-            </a:solidFill>
-          </a:ln>
-        </p:spPr>
-        <p:style>
-          <a:lnRef idx="1">
-            <a:schemeClr val="accent1"/>
-          </a:lnRef>
-          <a:fillRef idx="0">
-            <a:schemeClr val="accent1"/>
-          </a:fillRef>
-          <a:effectRef idx="0">
-            <a:schemeClr val="accent1"/>
-          </a:effectRef>
-          <a:fontRef idx="minor">
-            <a:schemeClr val="tx1"/>
-          </a:fontRef>
-        </p:style>
-      </p:cxnSp>
-      <p:cxnSp>
-        <p:nvCxnSpPr>
-          <p:cNvPr id="58" name="Connecteur droit 57"/>
-          <p:cNvCxnSpPr/>
-          <p:nvPr/>
-        </p:nvCxnSpPr>
-        <p:spPr>
-          <a:xfrm>
-            <a:off x="2868912" y="1471672"/>
-            <a:ext cx="0" cy="115943"/>
-          </a:xfrm>
-          <a:prstGeom prst="line">
-            <a:avLst/>
-          </a:prstGeom>
-          <a:ln w="28575">
-            <a:solidFill>
-              <a:srgbClr val="0070C0"/>
-            </a:solidFill>
-          </a:ln>
-        </p:spPr>
-        <p:style>
-          <a:lnRef idx="1">
-            <a:schemeClr val="accent1"/>
-          </a:lnRef>
-          <a:fillRef idx="0">
-            <a:schemeClr val="accent1"/>
-          </a:fillRef>
-          <a:effectRef idx="0">
-            <a:schemeClr val="accent1"/>
-          </a:effectRef>
-          <a:fontRef idx="minor">
-            <a:schemeClr val="tx1"/>
-          </a:fontRef>
-        </p:style>
-      </p:cxnSp>
-      <p:cxnSp>
-        <p:nvCxnSpPr>
-          <p:cNvPr id="59" name="Connecteur droit 58"/>
-          <p:cNvCxnSpPr/>
-          <p:nvPr/>
-        </p:nvCxnSpPr>
-        <p:spPr>
-          <a:xfrm>
-            <a:off x="1691680" y="1920865"/>
-            <a:ext cx="0" cy="245360"/>
-          </a:xfrm>
-          <a:prstGeom prst="line">
-            <a:avLst/>
-          </a:prstGeom>
-          <a:ln w="28575">
-            <a:solidFill>
-              <a:srgbClr val="0070C0"/>
-            </a:solidFill>
-            <a:prstDash val="sysDash"/>
-          </a:ln>
-        </p:spPr>
-        <p:style>
-          <a:lnRef idx="1">
-            <a:schemeClr val="accent1"/>
-          </a:lnRef>
-          <a:fillRef idx="0">
-            <a:schemeClr val="accent1"/>
-          </a:fillRef>
-          <a:effectRef idx="0">
-            <a:schemeClr val="accent1"/>
-          </a:effectRef>
-          <a:fontRef idx="minor">
-            <a:schemeClr val="tx1"/>
-          </a:fontRef>
-        </p:style>
-      </p:cxnSp>
-      <p:cxnSp>
-        <p:nvCxnSpPr>
-          <p:cNvPr id="60" name="Connecteur droit 59"/>
-          <p:cNvCxnSpPr/>
-          <p:nvPr/>
-        </p:nvCxnSpPr>
-        <p:spPr>
-          <a:xfrm>
-            <a:off x="1566839" y="2159488"/>
-            <a:ext cx="249681" cy="0"/>
-          </a:xfrm>
-          <a:prstGeom prst="line">
-            <a:avLst/>
-          </a:prstGeom>
-          <a:ln w="28575">
-            <a:solidFill>
-              <a:srgbClr val="0070C0"/>
-            </a:solidFill>
-          </a:ln>
-        </p:spPr>
-        <p:style>
-          <a:lnRef idx="1">
-            <a:schemeClr val="accent1"/>
-          </a:lnRef>
-          <a:fillRef idx="0">
-            <a:schemeClr val="accent1"/>
-          </a:fillRef>
-          <a:effectRef idx="0">
-            <a:schemeClr val="accent1"/>
-          </a:effectRef>
-          <a:fontRef idx="minor">
-            <a:schemeClr val="tx1"/>
-          </a:fontRef>
-        </p:style>
-      </p:cxnSp>
-      <p:cxnSp>
-        <p:nvCxnSpPr>
-          <p:cNvPr id="61" name="Connecteur droit 60"/>
-          <p:cNvCxnSpPr/>
-          <p:nvPr/>
-        </p:nvCxnSpPr>
-        <p:spPr>
-          <a:xfrm>
-            <a:off x="1804260" y="2050169"/>
-            <a:ext cx="0" cy="115943"/>
-          </a:xfrm>
-          <a:prstGeom prst="line">
-            <a:avLst/>
-          </a:prstGeom>
-          <a:ln w="28575">
-            <a:solidFill>
-              <a:srgbClr val="0070C0"/>
-            </a:solidFill>
-          </a:ln>
-        </p:spPr>
-        <p:style>
-          <a:lnRef idx="1">
-            <a:schemeClr val="accent1"/>
-          </a:lnRef>
-          <a:fillRef idx="0">
-            <a:schemeClr val="accent1"/>
-          </a:fillRef>
-          <a:effectRef idx="0">
-            <a:schemeClr val="accent1"/>
-          </a:effectRef>
-          <a:fontRef idx="minor">
-            <a:schemeClr val="tx1"/>
-          </a:fontRef>
-        </p:style>
-      </p:cxnSp>
-      <p:cxnSp>
-        <p:nvCxnSpPr>
-          <p:cNvPr id="62" name="Connecteur droit 61"/>
-          <p:cNvCxnSpPr/>
-          <p:nvPr/>
-        </p:nvCxnSpPr>
-        <p:spPr>
-          <a:xfrm>
-            <a:off x="1579910" y="2051769"/>
-            <a:ext cx="0" cy="115943"/>
-          </a:xfrm>
-          <a:prstGeom prst="line">
-            <a:avLst/>
-          </a:prstGeom>
-          <a:ln w="28575">
-            <a:solidFill>
-              <a:srgbClr val="0070C0"/>
-            </a:solidFill>
-          </a:ln>
-        </p:spPr>
-        <p:style>
-          <a:lnRef idx="1">
-            <a:schemeClr val="accent1"/>
-          </a:lnRef>
-          <a:fillRef idx="0">
-            <a:schemeClr val="accent1"/>
-          </a:fillRef>
-          <a:effectRef idx="0">
-            <a:schemeClr val="accent1"/>
-          </a:effectRef>
-          <a:fontRef idx="minor">
-            <a:schemeClr val="tx1"/>
-          </a:fontRef>
-        </p:style>
-      </p:cxnSp>
-      <p:cxnSp>
-        <p:nvCxnSpPr>
-          <p:cNvPr id="63" name="Connecteur droit 62"/>
-          <p:cNvCxnSpPr/>
-          <p:nvPr/>
-        </p:nvCxnSpPr>
-        <p:spPr>
-          <a:xfrm>
-            <a:off x="971600" y="2708920"/>
-            <a:ext cx="1800200" cy="0"/>
-          </a:xfrm>
-          <a:prstGeom prst="line">
-            <a:avLst/>
-          </a:prstGeom>
-          <a:ln w="28575">
-            <a:solidFill>
-              <a:srgbClr val="0070C0"/>
-            </a:solidFill>
-          </a:ln>
-        </p:spPr>
-        <p:style>
-          <a:lnRef idx="1">
-            <a:schemeClr val="accent1"/>
-          </a:lnRef>
-          <a:fillRef idx="0">
-            <a:schemeClr val="accent1"/>
-          </a:fillRef>
-          <a:effectRef idx="0">
-            <a:schemeClr val="accent1"/>
-          </a:effectRef>
-          <a:fontRef idx="minor">
-            <a:schemeClr val="tx1"/>
-          </a:fontRef>
-        </p:style>
-      </p:cxnSp>
-      <p:cxnSp>
-        <p:nvCxnSpPr>
-          <p:cNvPr id="64" name="Connecteur droit 63"/>
-          <p:cNvCxnSpPr/>
-          <p:nvPr/>
-        </p:nvCxnSpPr>
-        <p:spPr>
-          <a:xfrm>
-            <a:off x="3131840" y="2708920"/>
-            <a:ext cx="712543" cy="0"/>
-          </a:xfrm>
-          <a:prstGeom prst="line">
-            <a:avLst/>
-          </a:prstGeom>
-          <a:ln w="28575">
-            <a:solidFill>
-              <a:srgbClr val="0070C0"/>
-            </a:solidFill>
-          </a:ln>
-        </p:spPr>
-        <p:style>
-          <a:lnRef idx="1">
-            <a:schemeClr val="accent1"/>
-          </a:lnRef>
-          <a:fillRef idx="0">
-            <a:schemeClr val="accent1"/>
-          </a:fillRef>
-          <a:effectRef idx="0">
-            <a:schemeClr val="accent1"/>
-          </a:effectRef>
-          <a:fontRef idx="minor">
-            <a:schemeClr val="tx1"/>
-          </a:fontRef>
-        </p:style>
-      </p:cxnSp>
-      <p:cxnSp>
-        <p:nvCxnSpPr>
-          <p:cNvPr id="65" name="Connecteur droit 64"/>
-          <p:cNvCxnSpPr/>
-          <p:nvPr/>
-        </p:nvCxnSpPr>
-        <p:spPr>
-          <a:xfrm flipH="1">
-            <a:off x="2775655" y="2707328"/>
-            <a:ext cx="360040" cy="144016"/>
-          </a:xfrm>
-          <a:prstGeom prst="line">
-            <a:avLst/>
-          </a:prstGeom>
-          <a:ln w="28575">
-            <a:solidFill>
-              <a:srgbClr val="0070C0"/>
-            </a:solidFill>
-          </a:ln>
-        </p:spPr>
-        <p:style>
-          <a:lnRef idx="1">
-            <a:schemeClr val="accent1"/>
-          </a:lnRef>
-          <a:fillRef idx="0">
-            <a:schemeClr val="accent1"/>
-          </a:fillRef>
-          <a:effectRef idx="0">
-            <a:schemeClr val="accent1"/>
-          </a:effectRef>
-          <a:fontRef idx="minor">
-            <a:schemeClr val="tx1"/>
-          </a:fontRef>
-        </p:style>
-      </p:cxnSp>
-      <mc:AlternateContent xmlns:mc="http://schemas.openxmlformats.org/markup-compatibility/2006" xmlns:a14="http://schemas.microsoft.com/office/drawing/2010/main">
-        <mc:Choice Requires="a14">
-          <p:sp>
-            <p:nvSpPr>
-              <p:cNvPr id="66" name="ZoneTexte 65"/>
-              <p:cNvSpPr txBox="1"/>
-              <p:nvPr/>
-            </p:nvSpPr>
-            <p:spPr>
-              <a:xfrm>
-                <a:off x="2955675" y="2401143"/>
-                <a:ext cx="326371" cy="307777"/>
-              </a:xfrm>
-              <a:prstGeom prst="rect">
-                <a:avLst/>
-              </a:prstGeom>
-              <a:noFill/>
-            </p:spPr>
-            <p:txBody>
-              <a:bodyPr wrap="none" rtlCol="0">
-                <a:spAutoFit/>
-              </a:bodyPr>
-              <a:lstStyle/>
-              <a:p>
-                <a:pPr/>
-                <a14:m>
-                  <m:oMathPara xmlns:m="http://schemas.openxmlformats.org/officeDocument/2006/math">
-                    <m:oMathParaPr>
-                      <m:jc m:val="centerGroup"/>
-                    </m:oMathParaPr>
-                    <m:oMath xmlns:m="http://schemas.openxmlformats.org/officeDocument/2006/math">
-                      <m:r>
-                        <a:rPr lang="fr-FR" sz="1400" b="0" i="1" smtClean="0">
-                          <a:latin typeface="Cambria Math"/>
-                        </a:rPr>
-                        <m:t>𝑥</m:t>
-                      </m:r>
-                    </m:oMath>
-                  </m:oMathPara>
-                </a14:m>
-                <a:endParaRPr lang="fr-FR" dirty="0"/>
-              </a:p>
-            </p:txBody>
-          </p:sp>
-        </mc:Choice>
-        <mc:Fallback xmlns="">
-          <p:sp>
-            <p:nvSpPr>
-              <p:cNvPr id="66" name="ZoneTexte 65"/>
-              <p:cNvSpPr txBox="1">
-                <a:spLocks noRot="1" noChangeAspect="1" noMove="1" noResize="1" noEditPoints="1" noAdjustHandles="1" noChangeArrowheads="1" noChangeShapeType="1" noTextEdit="1"/>
-              </p:cNvSpPr>
-              <p:nvPr/>
-            </p:nvSpPr>
-            <p:spPr>
-              <a:xfrm>
-                <a:off x="2955675" y="2401143"/>
-                <a:ext cx="326371" cy="307777"/>
-              </a:xfrm>
-              <a:prstGeom prst="rect">
-                <a:avLst/>
-              </a:prstGeom>
-              <a:blipFill rotWithShape="1">
-                <a:blip r:embed="rId5"/>
-                <a:stretch>
-                  <a:fillRect/>
-                </a:stretch>
-              </a:blipFill>
-            </p:spPr>
-            <p:txBody>
-              <a:bodyPr/>
-              <a:lstStyle/>
-              <a:p>
-                <a:r>
-                  <a:rPr lang="fr-FR">
-                    <a:noFill/>
-                  </a:rPr>
-                  <a:t> </a:t>
-                </a:r>
-              </a:p>
-            </p:txBody>
-          </p:sp>
-        </mc:Fallback>
-      </mc:AlternateContent>
-      <p:cxnSp>
-        <p:nvCxnSpPr>
-          <p:cNvPr id="69" name="Connecteur droit 68"/>
-          <p:cNvCxnSpPr/>
-          <p:nvPr/>
-        </p:nvCxnSpPr>
-        <p:spPr>
-          <a:xfrm flipH="1">
-            <a:off x="2951820" y="2059256"/>
-            <a:ext cx="11900" cy="720080"/>
-          </a:xfrm>
-          <a:prstGeom prst="line">
-            <a:avLst/>
-          </a:prstGeom>
-          <a:ln w="28575">
-            <a:solidFill>
-              <a:srgbClr val="0070C0"/>
-            </a:solidFill>
-            <a:prstDash val="sysDash"/>
-          </a:ln>
-        </p:spPr>
-        <p:style>
-          <a:lnRef idx="1">
-            <a:schemeClr val="accent1"/>
-          </a:lnRef>
-          <a:fillRef idx="0">
-            <a:schemeClr val="accent1"/>
-          </a:fillRef>
-          <a:effectRef idx="0">
-            <a:schemeClr val="accent1"/>
-          </a:effectRef>
-          <a:fontRef idx="minor">
-            <a:schemeClr val="tx1"/>
-          </a:fontRef>
-        </p:style>
-      </p:cxnSp>
-      <mc:AlternateContent xmlns:mc="http://schemas.openxmlformats.org/markup-compatibility/2006" xmlns:a14="http://schemas.microsoft.com/office/drawing/2010/main">
-        <mc:Choice Requires="a14">
-          <p:sp>
-            <p:nvSpPr>
-              <p:cNvPr id="71" name="ZoneTexte 70"/>
-              <p:cNvSpPr txBox="1"/>
-              <p:nvPr/>
-            </p:nvSpPr>
-            <p:spPr>
-              <a:xfrm>
-                <a:off x="3844805" y="1005378"/>
-                <a:ext cx="344517" cy="307777"/>
-              </a:xfrm>
-              <a:prstGeom prst="rect">
-                <a:avLst/>
-              </a:prstGeom>
-              <a:noFill/>
-            </p:spPr>
-            <p:txBody>
-              <a:bodyPr wrap="none" rtlCol="0">
-                <a:spAutoFit/>
-              </a:bodyPr>
-              <a:lstStyle/>
-              <a:p>
-                <a:pPr/>
-                <a14:m>
-                  <m:oMathPara xmlns:m="http://schemas.openxmlformats.org/officeDocument/2006/math">
-                    <m:oMathParaPr>
-                      <m:jc m:val="centerGroup"/>
-                    </m:oMathParaPr>
-                    <m:oMath xmlns:m="http://schemas.openxmlformats.org/officeDocument/2006/math">
-                      <m:r>
-                        <a:rPr lang="fr-FR" sz="1400" b="0" i="1" smtClean="0">
-                          <a:latin typeface="Cambria Math"/>
-                        </a:rPr>
-                        <m:t>𝑋</m:t>
-                      </m:r>
-                    </m:oMath>
-                  </m:oMathPara>
-                </a14:m>
-                <a:endParaRPr lang="fr-FR" dirty="0"/>
-              </a:p>
-            </p:txBody>
-          </p:sp>
-        </mc:Choice>
-        <mc:Fallback xmlns="">
-          <p:sp>
-            <p:nvSpPr>
-              <p:cNvPr id="71" name="ZoneTexte 70"/>
-              <p:cNvSpPr txBox="1">
-                <a:spLocks noRot="1" noChangeAspect="1" noMove="1" noResize="1" noEditPoints="1" noAdjustHandles="1" noChangeArrowheads="1" noChangeShapeType="1" noTextEdit="1"/>
-              </p:cNvSpPr>
-              <p:nvPr/>
-            </p:nvSpPr>
-            <p:spPr>
-              <a:xfrm>
-                <a:off x="3844805" y="1005378"/>
-                <a:ext cx="344517" cy="307777"/>
-              </a:xfrm>
-              <a:prstGeom prst="rect">
-                <a:avLst/>
-              </a:prstGeom>
-              <a:blipFill rotWithShape="1">
-                <a:blip r:embed="rId6"/>
-                <a:stretch>
-                  <a:fillRect/>
-                </a:stretch>
-              </a:blipFill>
-            </p:spPr>
-            <p:txBody>
-              <a:bodyPr/>
-              <a:lstStyle/>
-              <a:p>
-                <a:r>
-                  <a:rPr lang="fr-FR">
-                    <a:noFill/>
-                  </a:rPr>
-                  <a:t> </a:t>
-                </a:r>
-              </a:p>
-            </p:txBody>
-          </p:sp>
-        </mc:Fallback>
-      </mc:AlternateContent>
-      <mc:AlternateContent xmlns:mc="http://schemas.openxmlformats.org/markup-compatibility/2006" xmlns:a14="http://schemas.microsoft.com/office/drawing/2010/main">
-        <mc:Choice Requires="a14">
-          <p:sp>
-            <p:nvSpPr>
-              <p:cNvPr id="72" name="ZoneTexte 71"/>
-              <p:cNvSpPr txBox="1"/>
-              <p:nvPr/>
-            </p:nvSpPr>
-            <p:spPr>
-              <a:xfrm>
-                <a:off x="489481" y="1463448"/>
-                <a:ext cx="482119" cy="307777"/>
-              </a:xfrm>
-              <a:prstGeom prst="rect">
-                <a:avLst/>
-              </a:prstGeom>
-              <a:noFill/>
-            </p:spPr>
-            <p:txBody>
-              <a:bodyPr wrap="none" rtlCol="0">
-                <a:spAutoFit/>
-              </a:bodyPr>
-              <a:lstStyle/>
-              <a:p>
-                <a:pPr/>
-                <a14:m>
-                  <m:oMathPara xmlns:m="http://schemas.openxmlformats.org/officeDocument/2006/math">
-                    <m:oMathParaPr>
-                      <m:jc m:val="centerGroup"/>
-                    </m:oMathParaPr>
-                    <m:oMath xmlns:m="http://schemas.openxmlformats.org/officeDocument/2006/math">
-                      <m:r>
-                        <a:rPr lang="fr-FR" sz="1400" b="0" i="1" smtClean="0">
-                          <a:latin typeface="Cambria Math"/>
-                        </a:rPr>
-                        <m:t>0 </m:t>
-                      </m:r>
-                      <m:r>
-                        <a:rPr lang="fr-FR" sz="1400" b="0" i="1" smtClean="0">
-                          <a:latin typeface="Cambria Math"/>
-                        </a:rPr>
-                        <m:t>𝑉</m:t>
-                      </m:r>
-                    </m:oMath>
-                  </m:oMathPara>
-                </a14:m>
-                <a:endParaRPr lang="fr-FR" dirty="0"/>
-              </a:p>
-            </p:txBody>
-          </p:sp>
-        </mc:Choice>
-        <mc:Fallback xmlns="">
-          <p:sp>
-            <p:nvSpPr>
-              <p:cNvPr id="72" name="ZoneTexte 71"/>
-              <p:cNvSpPr txBox="1">
-                <a:spLocks noRot="1" noChangeAspect="1" noMove="1" noResize="1" noEditPoints="1" noAdjustHandles="1" noChangeArrowheads="1" noChangeShapeType="1" noTextEdit="1"/>
-              </p:cNvSpPr>
-              <p:nvPr/>
-            </p:nvSpPr>
-            <p:spPr>
-              <a:xfrm>
-                <a:off x="489481" y="1463448"/>
-                <a:ext cx="482119" cy="307777"/>
-              </a:xfrm>
-              <a:prstGeom prst="rect">
-                <a:avLst/>
-              </a:prstGeom>
-              <a:blipFill rotWithShape="1">
-                <a:blip r:embed="rId7"/>
-                <a:stretch>
-                  <a:fillRect/>
-                </a:stretch>
-              </a:blipFill>
-            </p:spPr>
-            <p:txBody>
-              <a:bodyPr/>
-              <a:lstStyle/>
-              <a:p>
-                <a:r>
-                  <a:rPr lang="fr-FR">
-                    <a:noFill/>
-                  </a:rPr>
-                  <a:t> </a:t>
-                </a:r>
-              </a:p>
-            </p:txBody>
-          </p:sp>
-        </mc:Fallback>
-      </mc:AlternateContent>
-      <mc:AlternateContent xmlns:mc="http://schemas.openxmlformats.org/markup-compatibility/2006" xmlns:a14="http://schemas.microsoft.com/office/drawing/2010/main">
-        <mc:Choice Requires="a14">
-          <p:sp>
-            <p:nvSpPr>
-              <p:cNvPr id="73" name="ZoneTexte 72"/>
-              <p:cNvSpPr txBox="1"/>
-              <p:nvPr/>
-            </p:nvSpPr>
-            <p:spPr>
-              <a:xfrm>
-                <a:off x="489480" y="2555031"/>
-                <a:ext cx="482119" cy="307777"/>
-              </a:xfrm>
-              <a:prstGeom prst="rect">
-                <a:avLst/>
-              </a:prstGeom>
-              <a:noFill/>
-            </p:spPr>
-            <p:txBody>
-              <a:bodyPr wrap="none" rtlCol="0">
-                <a:spAutoFit/>
-              </a:bodyPr>
-              <a:lstStyle/>
-              <a:p>
-                <a:pPr/>
-                <a14:m>
-                  <m:oMathPara xmlns:m="http://schemas.openxmlformats.org/officeDocument/2006/math">
-                    <m:oMathParaPr>
-                      <m:jc m:val="centerGroup"/>
-                    </m:oMathParaPr>
-                    <m:oMath xmlns:m="http://schemas.openxmlformats.org/officeDocument/2006/math">
-                      <m:r>
-                        <a:rPr lang="fr-FR" sz="1400" b="0" i="1" smtClean="0">
-                          <a:latin typeface="Cambria Math"/>
-                        </a:rPr>
-                        <m:t>0 </m:t>
-                      </m:r>
-                      <m:r>
-                        <a:rPr lang="fr-FR" sz="1400" b="0" i="1" smtClean="0">
-                          <a:latin typeface="Cambria Math"/>
-                        </a:rPr>
-                        <m:t>𝑉</m:t>
-                      </m:r>
-                    </m:oMath>
-                  </m:oMathPara>
-                </a14:m>
-                <a:endParaRPr lang="fr-FR" dirty="0"/>
-              </a:p>
-            </p:txBody>
-          </p:sp>
-        </mc:Choice>
-        <mc:Fallback xmlns="">
-          <p:sp>
-            <p:nvSpPr>
-              <p:cNvPr id="73" name="ZoneTexte 72"/>
-              <p:cNvSpPr txBox="1">
-                <a:spLocks noRot="1" noChangeAspect="1" noMove="1" noResize="1" noEditPoints="1" noAdjustHandles="1" noChangeArrowheads="1" noChangeShapeType="1" noTextEdit="1"/>
-              </p:cNvSpPr>
-              <p:nvPr/>
-            </p:nvSpPr>
-            <p:spPr>
-              <a:xfrm>
-                <a:off x="489480" y="2555031"/>
-                <a:ext cx="482119" cy="307777"/>
-              </a:xfrm>
-              <a:prstGeom prst="rect">
-                <a:avLst/>
-              </a:prstGeom>
-              <a:blipFill rotWithShape="1">
-                <a:blip r:embed="rId7"/>
-                <a:stretch>
-                  <a:fillRect/>
-                </a:stretch>
-              </a:blipFill>
-            </p:spPr>
-            <p:txBody>
-              <a:bodyPr/>
-              <a:lstStyle/>
-              <a:p>
-                <a:r>
-                  <a:rPr lang="fr-FR">
-                    <a:noFill/>
-                  </a:rPr>
-                  <a:t> </a:t>
-                </a:r>
-              </a:p>
-            </p:txBody>
-          </p:sp>
-        </mc:Fallback>
-      </mc:AlternateContent>
-      <mc:AlternateContent xmlns:mc="http://schemas.openxmlformats.org/markup-compatibility/2006" xmlns:a14="http://schemas.microsoft.com/office/drawing/2010/main">
-        <mc:Choice Requires="a14">
-          <p:sp>
-            <p:nvSpPr>
-              <p:cNvPr id="74" name="ZoneTexte 73"/>
-              <p:cNvSpPr txBox="1"/>
-              <p:nvPr/>
-            </p:nvSpPr>
-            <p:spPr>
-              <a:xfrm>
-                <a:off x="4556927" y="1442650"/>
-                <a:ext cx="581506" cy="307777"/>
-              </a:xfrm>
-              <a:prstGeom prst="rect">
-                <a:avLst/>
-              </a:prstGeom>
-              <a:noFill/>
-            </p:spPr>
-            <p:txBody>
-              <a:bodyPr wrap="none" rtlCol="0">
-                <a:spAutoFit/>
-              </a:bodyPr>
-              <a:lstStyle/>
-              <a:p>
-                <a:pPr/>
-                <a14:m>
-                  <m:oMathPara xmlns:m="http://schemas.openxmlformats.org/officeDocument/2006/math">
-                    <m:oMathParaPr>
-                      <m:jc m:val="centerGroup"/>
-                    </m:oMathParaPr>
-                    <m:oMath xmlns:m="http://schemas.openxmlformats.org/officeDocument/2006/math">
-                      <m:r>
-                        <a:rPr lang="fr-FR" sz="1400" b="0" i="1" smtClean="0">
-                          <a:latin typeface="Cambria Math"/>
-                        </a:rPr>
-                        <m:t>12 </m:t>
-                      </m:r>
-                      <m:r>
-                        <a:rPr lang="fr-FR" sz="1400" b="0" i="1" smtClean="0">
-                          <a:latin typeface="Cambria Math"/>
-                        </a:rPr>
-                        <m:t>𝑉</m:t>
-                      </m:r>
-                    </m:oMath>
-                  </m:oMathPara>
-                </a14:m>
-                <a:endParaRPr lang="fr-FR" dirty="0"/>
-              </a:p>
-            </p:txBody>
-          </p:sp>
-        </mc:Choice>
-        <mc:Fallback xmlns="">
-          <p:sp>
-            <p:nvSpPr>
-              <p:cNvPr id="74" name="ZoneTexte 73"/>
-              <p:cNvSpPr txBox="1">
-                <a:spLocks noRot="1" noChangeAspect="1" noMove="1" noResize="1" noEditPoints="1" noAdjustHandles="1" noChangeArrowheads="1" noChangeShapeType="1" noTextEdit="1"/>
-              </p:cNvSpPr>
-              <p:nvPr/>
-            </p:nvSpPr>
-            <p:spPr>
-              <a:xfrm>
-                <a:off x="4556927" y="1442650"/>
-                <a:ext cx="581506" cy="307777"/>
-              </a:xfrm>
-              <a:prstGeom prst="rect">
-                <a:avLst/>
-              </a:prstGeom>
-              <a:blipFill rotWithShape="1">
-                <a:blip r:embed="rId8"/>
-                <a:stretch>
-                  <a:fillRect/>
-                </a:stretch>
-              </a:blipFill>
-            </p:spPr>
-            <p:txBody>
-              <a:bodyPr/>
-              <a:lstStyle/>
-              <a:p>
-                <a:r>
-                  <a:rPr lang="fr-FR">
-                    <a:noFill/>
-                  </a:rPr>
-                  <a:t> </a:t>
-                </a:r>
-              </a:p>
-            </p:txBody>
-          </p:sp>
-        </mc:Fallback>
-      </mc:AlternateContent>
-      <mc:AlternateContent xmlns:mc="http://schemas.openxmlformats.org/markup-compatibility/2006" xmlns:a14="http://schemas.microsoft.com/office/drawing/2010/main">
-        <mc:Choice Requires="a14">
-          <p:sp>
-            <p:nvSpPr>
-              <p:cNvPr id="75" name="ZoneTexte 74"/>
-              <p:cNvSpPr txBox="1"/>
-              <p:nvPr/>
-            </p:nvSpPr>
-            <p:spPr>
-              <a:xfrm>
-                <a:off x="4561174" y="2543567"/>
-                <a:ext cx="680892" cy="307777"/>
-              </a:xfrm>
-              <a:prstGeom prst="rect">
-                <a:avLst/>
-              </a:prstGeom>
-              <a:noFill/>
-            </p:spPr>
-            <p:txBody>
-              <a:bodyPr wrap="none" rtlCol="0">
-                <a:spAutoFit/>
-              </a:bodyPr>
-              <a:lstStyle/>
-              <a:p>
-                <a:pPr/>
-                <a14:m>
-                  <m:oMathPara xmlns:m="http://schemas.openxmlformats.org/officeDocument/2006/math">
-                    <m:oMathParaPr>
-                      <m:jc m:val="centerGroup"/>
-                    </m:oMathParaPr>
-                    <m:oMath xmlns:m="http://schemas.openxmlformats.org/officeDocument/2006/math">
-                      <m:r>
-                        <a:rPr lang="fr-FR" sz="1400" i="1" smtClean="0">
-                          <a:latin typeface="Cambria Math"/>
-                        </a:rPr>
-                        <m:t>2</m:t>
-                      </m:r>
-                      <m:r>
-                        <a:rPr lang="fr-FR" sz="1400" b="0" i="1" smtClean="0">
-                          <a:latin typeface="Cambria Math"/>
-                        </a:rPr>
-                        <m:t>30 </m:t>
-                      </m:r>
-                      <m:r>
-                        <a:rPr lang="fr-FR" sz="1400" b="0" i="1" smtClean="0">
-                          <a:latin typeface="Cambria Math"/>
-                        </a:rPr>
-                        <m:t>𝑉</m:t>
-                      </m:r>
-                    </m:oMath>
-                  </m:oMathPara>
-                </a14:m>
-                <a:endParaRPr lang="fr-FR" dirty="0"/>
-              </a:p>
-            </p:txBody>
-          </p:sp>
-        </mc:Choice>
-        <mc:Fallback xmlns="">
-          <p:sp>
-            <p:nvSpPr>
-              <p:cNvPr id="75" name="ZoneTexte 74"/>
-              <p:cNvSpPr txBox="1">
-                <a:spLocks noRot="1" noChangeAspect="1" noMove="1" noResize="1" noEditPoints="1" noAdjustHandles="1" noChangeArrowheads="1" noChangeShapeType="1" noTextEdit="1"/>
-              </p:cNvSpPr>
-              <p:nvPr/>
-            </p:nvSpPr>
-            <p:spPr>
-              <a:xfrm>
-                <a:off x="4561174" y="2543567"/>
-                <a:ext cx="680892" cy="307777"/>
-              </a:xfrm>
-              <a:prstGeom prst="rect">
-                <a:avLst/>
-              </a:prstGeom>
-              <a:blipFill rotWithShape="1">
-                <a:blip r:embed="rId9"/>
-                <a:stretch>
-                  <a:fillRect/>
-                </a:stretch>
-              </a:blipFill>
-            </p:spPr>
-            <p:txBody>
-              <a:bodyPr/>
-              <a:lstStyle/>
-              <a:p>
-                <a:r>
-                  <a:rPr lang="fr-FR">
-                    <a:noFill/>
-                  </a:rPr>
-                  <a:t> </a:t>
-                </a:r>
-              </a:p>
-            </p:txBody>
-          </p:sp>
-        </mc:Fallback>
-      </mc:AlternateContent>
-      <p:sp>
-        <p:nvSpPr>
-          <p:cNvPr id="77" name="Ellipse 76"/>
-          <p:cNvSpPr/>
-          <p:nvPr/>
-        </p:nvSpPr>
-        <p:spPr>
-          <a:xfrm>
-            <a:off x="3844383" y="2564904"/>
-            <a:ext cx="288032" cy="288032"/>
-          </a:xfrm>
-          <a:prstGeom prst="ellipse">
-            <a:avLst/>
-          </a:prstGeom>
-          <a:ln w="28575">
-            <a:solidFill>
-              <a:srgbClr val="0070C0"/>
-            </a:solidFill>
-          </a:ln>
-        </p:spPr>
-        <p:style>
-          <a:lnRef idx="1">
-            <a:schemeClr val="accent1"/>
-          </a:lnRef>
-          <a:fillRef idx="0">
-            <a:schemeClr val="accent1"/>
-          </a:fillRef>
-          <a:effectRef idx="0">
-            <a:schemeClr val="accent1"/>
-          </a:effectRef>
-          <a:fontRef idx="minor">
-            <a:schemeClr val="tx1"/>
-          </a:fontRef>
-        </p:style>
-        <p:txBody>
-          <a:bodyPr rtlCol="0" anchor="ctr"/>
-          <a:lstStyle/>
-          <a:p>
-            <a:pPr algn="ctr"/>
-            <a:r>
-              <a:rPr lang="fr-FR" sz="1200" b="1" i="1" dirty="0">
-                <a:solidFill>
-                  <a:schemeClr val="tx1"/>
-                </a:solidFill>
-              </a:rPr>
-              <a:t>M</a:t>
-            </a:r>
-            <a:endParaRPr lang="fr-FR" b="1" i="1" dirty="0">
-              <a:solidFill>
-                <a:schemeClr val="tx1"/>
-              </a:solidFill>
-            </a:endParaRPr>
-          </a:p>
-        </p:txBody>
-      </p:sp>
-      <p:cxnSp>
-        <p:nvCxnSpPr>
-          <p:cNvPr id="78" name="Connecteur droit 77"/>
-          <p:cNvCxnSpPr>
-            <a:endCxn id="77" idx="6"/>
-          </p:cNvCxnSpPr>
-          <p:nvPr/>
-        </p:nvCxnSpPr>
-        <p:spPr>
-          <a:xfrm flipH="1">
-            <a:off x="4132415" y="2708920"/>
-            <a:ext cx="424512" cy="0"/>
-          </a:xfrm>
-          <a:prstGeom prst="line">
-            <a:avLst/>
-          </a:prstGeom>
-          <a:ln w="28575">
-            <a:solidFill>
-              <a:srgbClr val="0070C0"/>
-            </a:solidFill>
-          </a:ln>
-        </p:spPr>
-        <p:style>
-          <a:lnRef idx="1">
-            <a:schemeClr val="accent1"/>
-          </a:lnRef>
-          <a:fillRef idx="0">
-            <a:schemeClr val="accent1"/>
-          </a:fillRef>
-          <a:effectRef idx="0">
-            <a:schemeClr val="accent1"/>
-          </a:effectRef>
-          <a:fontRef idx="minor">
-            <a:schemeClr val="tx1"/>
-          </a:fontRef>
-        </p:style>
-      </p:cxnSp>
-    </p:spTree>
-    <p:extLst>
-      <p:ext uri="{BB962C8B-B14F-4D97-AF65-F5344CB8AC3E}">
-        <p14:creationId xmlns:p14="http://schemas.microsoft.com/office/powerpoint/2010/main" val="305331807"/>
-      </p:ext>
-    </p:extLst>
-  </p:cSld>
-  <p:clrMapOvr>
-    <a:masterClrMapping/>
-  </p:clrMapOvr>
-</p:sld>
-</file>
-
 <file path=ppt/theme/theme1.xml><?xml version="1.0" encoding="utf-8"?>
 <a:theme xmlns:a="http://schemas.openxmlformats.org/drawingml/2006/main" name="Thème Office">
   <a:themeElements>
